--- a/system-design-101/vi/lessons/sd-13-020/slides/sd-13-020.pptx
+++ b/system-design-101/vi/lessons/sd-13-020/slides/sd-13-020.pptx
@@ -2699,90 +2699,7 @@
       </p:sp>
       <p:sp>
         <p:nvSpPr>
-          <p:cNvPr id="17" name="Text 15"/>
-          <p:cNvSpPr/>
-          <p:nvPr/>
-        </p:nvSpPr>
-        <p:spPr>
-          <a:xfrm>
-            <a:off x="914400" y="9525000"/>
-            <a:ext cx="8572500" cy="342900"/>
-          </a:xfrm>
-          <a:prstGeom prst="rect">
-            <a:avLst/>
-          </a:prstGeom>
-          <a:noFill/>
-          <a:ln/>
-        </p:spPr>
-        <p:txBody>
-          <a:bodyPr wrap="square" lIns="0" tIns="0" rIns="0" bIns="0" rtlCol="0" anchor="t"/>
-          <a:lstStyle/>
-          <a:p>
-            <a:pPr algn="l" indent="0" marL="0">
-              <a:buNone/>
-            </a:pPr>
-            <a:r>
-              <a:rPr lang="en-US" sz="1800" dirty="0" spc="-13" kern="0">
-                <a:solidFill>
-                  <a:srgbClr val="9AA0B5"/>
-                </a:solidFill>
-                <a:latin typeface="Be Vietnam Pro" pitchFamily="34" charset="0"/>
-                <a:ea typeface="Be Vietnam Pro" pitchFamily="34" charset="-122"/>
-                <a:cs typeface="Be Vietnam Pro" pitchFamily="34" charset="-120"/>
-              </a:rPr>
-              <a:t>System</a:t>
-            </a:r>
-            <a:r>
-              <a:rPr lang="en-US" sz="1800" dirty="0" spc="-1" kern="0">
-                <a:solidFill>
-                  <a:srgbClr val="9AA0B5"/>
-                </a:solidFill>
-                <a:latin typeface="Be Vietnam Pro" pitchFamily="34" charset="0"/>
-                <a:ea typeface="Be Vietnam Pro" pitchFamily="34" charset="-122"/>
-                <a:cs typeface="Be Vietnam Pro" pitchFamily="34" charset="-120"/>
-              </a:rPr>
-              <a:t> Design</a:t>
-            </a:r>
-            <a:r>
-              <a:rPr lang="en-US" sz="1800" dirty="0" spc="4" kern="0">
-                <a:solidFill>
-                  <a:srgbClr val="9AA0B5"/>
-                </a:solidFill>
-                <a:latin typeface="Be Vietnam Pro" pitchFamily="34" charset="0"/>
-                <a:ea typeface="Be Vietnam Pro" pitchFamily="34" charset="-122"/>
-                <a:cs typeface="Be Vietnam Pro" pitchFamily="34" charset="-120"/>
-              </a:rPr>
-              <a:t> 101</a:t>
-            </a:r>
-            <a:r>
-              <a:rPr lang="en-US" sz="1800" dirty="0" spc="-2" kern="0">
-                <a:solidFill>
-                  <a:srgbClr val="9AA0B5"/>
-                </a:solidFill>
-                <a:latin typeface="Be Vietnam Pro" pitchFamily="34" charset="0"/>
-                <a:ea typeface="Be Vietnam Pro" pitchFamily="34" charset="-122"/>
-                <a:cs typeface="Be Vietnam Pro" pitchFamily="34" charset="-120"/>
-              </a:rPr>
-              <a:t> ·</a:t>
-            </a:r>
-            <a:r>
-              <a:rPr lang="en-US" sz="1800" dirty="0" spc="1" kern="0">
-                <a:solidFill>
-                  <a:srgbClr val="9AA0B5"/>
-                </a:solidFill>
-                <a:latin typeface="Be Vietnam Pro" pitchFamily="34" charset="0"/>
-                <a:ea typeface="Be Vietnam Pro" pitchFamily="34" charset="-122"/>
-                <a:cs typeface="Be Vietnam Pro" pitchFamily="34" charset="-120"/>
-              </a:rPr>
-              <a:t> Bài 20</a:t>
-            </a:r>
-            <a:endParaRPr lang="en-US" sz="1800" dirty="0"/>
-          </a:p>
-        </p:txBody>
-      </p:sp>
-      <p:sp>
-        <p:nvSpPr>
-          <p:cNvPr id="18" name="Shape 16"/>
+          <p:cNvPr id="17" name="Shape 15"/>
           <p:cNvSpPr/>
           <p:nvPr/>
         </p:nvSpPr>
@@ -2806,7 +2723,7 @@
       </p:sp>
       <p:pic>
         <p:nvPicPr>
-          <p:cNvPr id="19" name="Moda image moda-export-watermark-884ac12d-6f81-47a4-b357-195d07cb003c" descr="">    </p:cNvPr>
+          <p:cNvPr id="18" name="Moda image moda-export-watermark-884ac12d-6f81-47a4-b357-195d07cb003c" descr="">    </p:cNvPr>
           <p:cNvPicPr>
             <a:picLocks noChangeAspect="1"/>
           </p:cNvPicPr>

--- a/system-design-101/vi/lessons/sd-13-020/slides/sd-13-020.pptx
+++ b/system-design-101/vi/lessons/sd-13-020/slides/sd-13-020.pptx
@@ -10378,7 +10378,7 @@
         <p:spPr>
           <a:xfrm>
             <a:off x="914400" y="2238375"/>
-            <a:ext cx="16459200" cy="533400"/>
+            <a:ext cx="16459200" cy="1143000"/>
           </a:xfrm>
           <a:prstGeom prst="rect">
             <a:avLst/>
@@ -10394,7 +10394,7 @@
               <a:buNone/>
             </a:pPr>
             <a:r>
-              <a:rPr lang="en-US" sz="2850" dirty="0" spc="-76" kern="0">
+              <a:rPr lang="en-US" sz="2850" dirty="0" spc="0" kern="0">
                 <a:solidFill>
                   <a:srgbClr val="E4E1D8"/>
                 </a:solidFill>
@@ -10402,10 +10402,10 @@
                 <a:ea typeface="Be Vietnam Pro SemiBold" pitchFamily="34" charset="-122"/>
                 <a:cs typeface="Be Vietnam Pro SemiBold" pitchFamily="34" charset="-120"/>
               </a:rPr>
-              <a:t>Tùy</a:t>
-            </a:r>
-            <a:r>
-              <a:rPr lang="en-US" sz="2850" dirty="0" spc="3" kern="0">
+              <a:t>Có</a:t>
+            </a:r>
+            <a:r>
+              <a:rPr lang="en-US" sz="2850" dirty="0" spc="4" kern="0">
                 <a:solidFill>
                   <a:srgbClr val="E4E1D8"/>
                 </a:solidFill>
@@ -10413,10 +10413,10 @@
                 <a:ea typeface="Be Vietnam Pro SemiBold" pitchFamily="34" charset="-122"/>
                 <a:cs typeface="Be Vietnam Pro SemiBold" pitchFamily="34" charset="-120"/>
               </a:rPr>
-              <a:t> cách</a:t>
-            </a:r>
-            <a:r>
-              <a:rPr lang="en-US" sz="2850" dirty="0" spc="-3" kern="0">
+              <a:t> mặc</a:t>
+            </a:r>
+            <a:r>
+              <a:rPr lang="en-US" sz="2850" dirty="0" spc="15" kern="0">
                 <a:solidFill>
                   <a:srgbClr val="E4E1D8"/>
                 </a:solidFill>
@@ -10424,10 +10424,10 @@
                 <a:ea typeface="Be Vietnam Pro SemiBold" pitchFamily="34" charset="-122"/>
                 <a:cs typeface="Be Vietnam Pro SemiBold" pitchFamily="34" charset="-120"/>
               </a:rPr>
-              <a:t> thêm</a:t>
-            </a:r>
-            <a:r>
-              <a:rPr lang="en-US" sz="2850" dirty="0" spc="-8" kern="0">
+              <a:t> định:</a:t>
+            </a:r>
+            <a:r>
+              <a:rPr lang="en-US" sz="2850" dirty="0" spc="-1" kern="0">
                 <a:solidFill>
                   <a:srgbClr val="E4E1D8"/>
                 </a:solidFill>
@@ -10435,10 +10435,10 @@
                 <a:ea typeface="Be Vietnam Pro SemiBold" pitchFamily="34" charset="-122"/>
                 <a:cs typeface="Be Vietnam Pro SemiBold" pitchFamily="34" charset="-120"/>
               </a:rPr>
-              <a:t> cột.</a:t>
-            </a:r>
-            <a:r>
-              <a:rPr lang="en-US" sz="2850" dirty="0" spc="-1" kern="0">
+              <a:t> bản</a:t>
+            </a:r>
+            <a:r>
+              <a:rPr lang="en-US" sz="2850" dirty="0" spc="4" kern="0">
                 <a:solidFill>
                   <a:srgbClr val="E4E1D8"/>
                 </a:solidFill>
@@ -10446,10 +10446,10 @@
                 <a:ea typeface="Be Vietnam Pro SemiBold" pitchFamily="34" charset="-122"/>
                 <a:cs typeface="Be Vietnam Pro SemiBold" pitchFamily="34" charset="-120"/>
               </a:rPr>
-              <a:t> An</a:t>
-            </a:r>
-            <a:r>
-              <a:rPr lang="en-US" sz="2850" dirty="0" spc="-9" kern="0">
+              <a:t> cũ</a:t>
+            </a:r>
+            <a:r>
+              <a:rPr lang="en-US" sz="2850" dirty="0" spc="-14" kern="0">
                 <a:solidFill>
                   <a:srgbClr val="E4E1D8"/>
                 </a:solidFill>
@@ -10457,10 +10457,10 @@
                 <a:ea typeface="Be Vietnam Pro SemiBold" pitchFamily="34" charset="-122"/>
                 <a:cs typeface="Be Vietnam Pro SemiBold" pitchFamily="34" charset="-120"/>
               </a:rPr>
-              <a:t> toàn</a:t>
-            </a:r>
-            <a:r>
-              <a:rPr lang="en-US" sz="2850" dirty="0" spc="-7" kern="0">
+              <a:t> vẫn</a:t>
+            </a:r>
+            <a:r>
+              <a:rPr lang="en-US" sz="2850" dirty="0" spc="1" kern="0">
                 <a:solidFill>
                   <a:srgbClr val="E4E1D8"/>
                 </a:solidFill>
@@ -10468,10 +10468,10 @@
                 <a:ea typeface="Be Vietnam Pro SemiBold" pitchFamily="34" charset="-122"/>
                 <a:cs typeface="Be Vietnam Pro SemiBold" pitchFamily="34" charset="-120"/>
               </a:rPr>
-              <a:t> nhất:</a:t>
-            </a:r>
-            <a:r>
-              <a:rPr lang="en-US" sz="2850" dirty="0" spc="-4" kern="0">
+              <a:t> ghi</a:t>
+            </a:r>
+            <a:r>
+              <a:rPr lang="en-US" sz="2850" dirty="0" spc="9" kern="0">
                 <a:solidFill>
                   <a:srgbClr val="E4E1D8"/>
                 </a:solidFill>
@@ -10479,10 +10479,10 @@
                 <a:ea typeface="Be Vietnam Pro SemiBold" pitchFamily="34" charset="-122"/>
                 <a:cs typeface="Be Vietnam Pro SemiBold" pitchFamily="34" charset="-120"/>
               </a:rPr>
-              <a:t> mở</a:t>
-            </a:r>
-            <a:r>
-              <a:rPr lang="en-US" sz="2850" dirty="0" spc="-22" kern="0">
+              <a:t> được.</a:t>
+            </a:r>
+            <a:r>
+              <a:rPr lang="en-US" sz="2850" dirty="0" spc="-6" kern="0">
                 <a:solidFill>
                   <a:srgbClr val="E4E1D8"/>
                 </a:solidFill>
@@ -10490,10 +10490,10 @@
                 <a:ea typeface="Be Vietnam Pro SemiBold" pitchFamily="34" charset="-122"/>
                 <a:cs typeface="Be Vietnam Pro SemiBold" pitchFamily="34" charset="-120"/>
               </a:rPr>
-              <a:t> rộng</a:t>
-            </a:r>
-            <a:r>
-              <a:rPr lang="en-US" sz="2850" dirty="0" spc="-21" kern="0">
+              <a:t> Không</a:t>
+            </a:r>
+            <a:r>
+              <a:rPr lang="en-US" sz="2850" dirty="0" spc="4" kern="0">
                 <a:solidFill>
                   <a:srgbClr val="E4E1D8"/>
                 </a:solidFill>
@@ -10501,10 +10501,10 @@
                 <a:ea typeface="Be Vietnam Pro SemiBold" pitchFamily="34" charset="-122"/>
                 <a:cs typeface="Be Vietnam Pro SemiBold" pitchFamily="34" charset="-120"/>
               </a:rPr>
-              <a:t> rồi</a:t>
-            </a:r>
-            <a:r>
-              <a:rPr lang="en-US" sz="2850" dirty="0" spc="2" kern="0">
+              <a:t> mặc</a:t>
+            </a:r>
+            <a:r>
+              <a:rPr lang="en-US" sz="2850" dirty="0" spc="15" kern="0">
                 <a:solidFill>
                   <a:srgbClr val="E4E1D8"/>
                 </a:solidFill>
@@ -10512,10 +10512,164 @@
                 <a:ea typeface="Be Vietnam Pro SemiBold" pitchFamily="34" charset="-122"/>
                 <a:cs typeface="Be Vietnam Pro SemiBold" pitchFamily="34" charset="-120"/>
               </a:rPr>
+              <a:t> định:</a:t>
+            </a:r>
+            <a:r>
+              <a:rPr lang="en-US" sz="2850" dirty="0" spc="-3" kern="0">
+                <a:solidFill>
+                  <a:srgbClr val="E4E1D8"/>
+                </a:solidFill>
+                <a:latin typeface="Be Vietnam Pro SemiBold" pitchFamily="34" charset="0"/>
+                <a:ea typeface="Be Vietnam Pro SemiBold" pitchFamily="34" charset="-122"/>
+                <a:cs typeface="Be Vietnam Pro SemiBold" pitchFamily="34" charset="-120"/>
+              </a:rPr>
+              <a:t> lỗi,</a:t>
+            </a:r>
+            <a:r>
+              <a:rPr lang="en-US" sz="2850" dirty="0" spc="-18" kern="0">
+                <a:solidFill>
+                  <a:srgbClr val="E4E1D8"/>
+                </a:solidFill>
+                <a:latin typeface="Be Vietnam Pro SemiBold" pitchFamily="34" charset="0"/>
+                <a:ea typeface="Be Vietnam Pro SemiBold" pitchFamily="34" charset="-122"/>
+                <a:cs typeface="Be Vietnam Pro SemiBold" pitchFamily="34" charset="-120"/>
+              </a:rPr>
+              <a:t> và</a:t>
+            </a:r>
+            <a:r>
+              <a:rPr lang="en-US" sz="2850" dirty="0" spc="-15" kern="0">
+                <a:solidFill>
+                  <a:srgbClr val="E4E1D8"/>
+                </a:solidFill>
+                <a:latin typeface="Be Vietnam Pro SemiBold" pitchFamily="34" charset="0"/>
+                <a:ea typeface="Be Vietnam Pro SemiBold" pitchFamily="34" charset="-122"/>
+                <a:cs typeface="Be Vietnam Pro SemiBold" pitchFamily="34" charset="-120"/>
+              </a:rPr>
+              <a:t> PostgreSQL</a:t>
+            </a:r>
+            <a:r>
+              <a:rPr lang="en-US" sz="2850" dirty="0" spc="2" kern="0">
+                <a:solidFill>
+                  <a:srgbClr val="E4E1D8"/>
+                </a:solidFill>
+                <a:latin typeface="Be Vietnam Pro SemiBold" pitchFamily="34" charset="0"/>
+                <a:ea typeface="Be Vietnam Pro SemiBold" pitchFamily="34" charset="-122"/>
+                <a:cs typeface="Be Vietnam Pro SemiBold" pitchFamily="34" charset="-120"/>
+              </a:rPr>
+              <a:t> từ</a:t>
+            </a:r>
+            <a:r>
+              <a:rPr lang="en-US" sz="2850" dirty="0" spc="-2" kern="0">
+                <a:solidFill>
+                  <a:srgbClr val="E4E1D8"/>
+                </a:solidFill>
+                <a:latin typeface="Be Vietnam Pro SemiBold" pitchFamily="34" charset="0"/>
+                <a:ea typeface="Be Vietnam Pro SemiBold" pitchFamily="34" charset="-122"/>
+                <a:cs typeface="Be Vietnam Pro SemiBold" pitchFamily="34" charset="-120"/>
+              </a:rPr>
+              <a:t> chối</a:t>
+            </a:r>
+            <a:r>
+              <a:rPr lang="en-US" sz="2850" dirty="0" spc="-17" kern="0">
+                <a:solidFill>
+                  <a:srgbClr val="E4E1D8"/>
+                </a:solidFill>
+                <a:latin typeface="Be Vietnam Pro SemiBold" pitchFamily="34" charset="0"/>
+                <a:ea typeface="Be Vietnam Pro SemiBold" pitchFamily="34" charset="-122"/>
+                <a:cs typeface="Be Vietnam Pro SemiBold" pitchFamily="34" charset="-120"/>
+              </a:rPr>
+              <a:t> ngay</a:t>
+            </a:r>
+            <a:r>
+              <a:rPr lang="en-US" sz="2850" dirty="0" spc="-1" kern="0">
+                <a:solidFill>
+                  <a:srgbClr val="E4E1D8"/>
+                </a:solidFill>
+                <a:latin typeface="Be Vietnam Pro SemiBold" pitchFamily="34" charset="0"/>
+                <a:ea typeface="Be Vietnam Pro SemiBold" pitchFamily="34" charset="-122"/>
+                <a:cs typeface="Be Vietnam Pro SemiBold" pitchFamily="34" charset="-120"/>
+              </a:rPr>
+              <a:t> ở</a:t>
+            </a:r>
+            <a:r>
+              <a:rPr lang="en-US" sz="2850" dirty="0" spc="-13" kern="0">
+                <a:solidFill>
+                  <a:srgbClr val="E4E1D8"/>
+                </a:solidFill>
+                <a:latin typeface="Be Vietnam Pro SemiBold" pitchFamily="34" charset="0"/>
+                <a:ea typeface="Be Vietnam Pro SemiBold" pitchFamily="34" charset="-122"/>
+                <a:cs typeface="Be Vietnam Pro SemiBold" pitchFamily="34" charset="-120"/>
+              </a:rPr>
+              <a:t> migration.</a:t>
+            </a:r>
+            <a:r>
+              <a:rPr lang="en-US" sz="2850" dirty="0" spc="0" kern="0">
+                <a:solidFill>
+                  <a:srgbClr val="E4E1D8"/>
+                </a:solidFill>
+                <a:latin typeface="Be Vietnam Pro SemiBold" pitchFamily="34" charset="0"/>
+                <a:ea typeface="Be Vietnam Pro SemiBold" pitchFamily="34" charset="-122"/>
+                <a:cs typeface="Be Vietnam Pro SemiBold" pitchFamily="34" charset="-120"/>
+              </a:rPr>
+              <a:t> An</a:t>
+            </a:r>
+            <a:r>
+              <a:rPr lang="en-US" sz="2850" dirty="0" spc="-8" kern="0">
+                <a:solidFill>
+                  <a:srgbClr val="E4E1D8"/>
+                </a:solidFill>
+                <a:latin typeface="Be Vietnam Pro SemiBold" pitchFamily="34" charset="0"/>
+                <a:ea typeface="Be Vietnam Pro SemiBold" pitchFamily="34" charset="-122"/>
+                <a:cs typeface="Be Vietnam Pro SemiBold" pitchFamily="34" charset="-120"/>
+              </a:rPr>
+              <a:t> toàn nhất:</a:t>
+            </a:r>
+            <a:r>
+              <a:rPr lang="en-US" sz="2850" dirty="0" spc="-3" kern="0">
+                <a:solidFill>
+                  <a:srgbClr val="E4E1D8"/>
+                </a:solidFill>
+                <a:latin typeface="Be Vietnam Pro SemiBold" pitchFamily="34" charset="0"/>
+                <a:ea typeface="Be Vietnam Pro SemiBold" pitchFamily="34" charset="-122"/>
+                <a:cs typeface="Be Vietnam Pro SemiBold" pitchFamily="34" charset="-120"/>
+              </a:rPr>
+              <a:t> mở</a:t>
+            </a:r>
+            <a:r>
+              <a:rPr lang="en-US" sz="2850" dirty="0" spc="-22" kern="0">
+                <a:solidFill>
+                  <a:srgbClr val="E4E1D8"/>
+                </a:solidFill>
+                <a:latin typeface="Be Vietnam Pro SemiBold" pitchFamily="34" charset="0"/>
+                <a:ea typeface="Be Vietnam Pro SemiBold" pitchFamily="34" charset="-122"/>
+                <a:cs typeface="Be Vietnam Pro SemiBold" pitchFamily="34" charset="-120"/>
+              </a:rPr>
+              <a:t> rộng</a:t>
+            </a:r>
+            <a:r>
+              <a:rPr lang="en-US" sz="2850" dirty="0" spc="-20" kern="0">
+                <a:solidFill>
+                  <a:srgbClr val="E4E1D8"/>
+                </a:solidFill>
+                <a:latin typeface="Be Vietnam Pro SemiBold" pitchFamily="34" charset="0"/>
+                <a:ea typeface="Be Vietnam Pro SemiBold" pitchFamily="34" charset="-122"/>
+                <a:cs typeface="Be Vietnam Pro SemiBold" pitchFamily="34" charset="-120"/>
+              </a:rPr>
+              <a:t> rồi</a:t>
+            </a:r>
+            <a:r>
+              <a:rPr lang="en-US" sz="2850" dirty="0" spc="2" kern="0">
+                <a:solidFill>
+                  <a:srgbClr val="E4E1D8"/>
+                </a:solidFill>
+                <a:latin typeface="Be Vietnam Pro SemiBold" pitchFamily="34" charset="0"/>
+                <a:ea typeface="Be Vietnam Pro SemiBold" pitchFamily="34" charset="-122"/>
+                <a:cs typeface="Be Vietnam Pro SemiBold" pitchFamily="34" charset="-120"/>
+              </a:rPr>
               <a:t> thu</a:t>
             </a:r>
             <a:r>
-              <a:rPr lang="en-US" sz="2850" dirty="0" spc="-10" kern="0">
+              <a:rPr lang="en-US" sz="2850" dirty="0" spc="-11" kern="0">
                 <a:solidFill>
                   <a:srgbClr val="E4E1D8"/>
                 </a:solidFill>

--- a/system-design-101/vi/lessons/sd-13-020/slides/sd-13-020.pptx
+++ b/system-design-101/vi/lessons/sd-13-020/slides/sd-13-020.pptx
@@ -2033,7 +2033,7 @@
         <p:spPr>
           <a:xfrm>
             <a:off x="914400" y="5905500"/>
-            <a:ext cx="3886200" cy="2381250"/>
+            <a:ext cx="3048000" cy="2381250"/>
           </a:xfrm>
           <a:prstGeom prst="roundRect">
             <a:avLst>
@@ -2099,7 +2099,7 @@
         <p:spPr>
           <a:xfrm>
             <a:off x="1181100" y="6572250"/>
-            <a:ext cx="3352800" cy="1524000"/>
+            <a:ext cx="2514600" cy="1524000"/>
           </a:xfrm>
           <a:prstGeom prst="rect">
             <a:avLst/>
@@ -2115,7 +2115,7 @@
               <a:buNone/>
             </a:pPr>
             <a:r>
-              <a:rPr lang="en-US" sz="2400" dirty="0" spc="-22" kern="0">
+              <a:rPr lang="en-US" sz="2250" dirty="0" spc="-18" kern="0">
                 <a:solidFill>
                   <a:srgbClr val="7C93FF"/>
                 </a:solidFill>
@@ -2126,7 +2126,7 @@
               <a:t>Lỗi</a:t>
             </a:r>
             <a:r>
-              <a:rPr lang="en-US" sz="2400" dirty="0" spc="1" kern="0">
+              <a:rPr lang="en-US" sz="2250" dirty="0" spc="2" kern="0">
                 <a:solidFill>
                   <a:srgbClr val="7C93FF"/>
                 </a:solidFill>
@@ -2137,7 +2137,7 @@
               <a:t> chỉ</a:t>
             </a:r>
             <a:r>
-              <a:rPr lang="en-US" sz="2400" dirty="0" spc="-6" kern="0">
+              <a:rPr lang="en-US" sz="2250" dirty="0" spc="-6" kern="0">
                 <a:solidFill>
                   <a:srgbClr val="7C93FF"/>
                 </a:solidFill>
@@ -2148,7 +2148,7 @@
               <a:t> lộ</a:t>
             </a:r>
             <a:r>
-              <a:rPr lang="en-US" sz="2400" dirty="0" spc="0" kern="0">
+              <a:rPr lang="en-US" sz="2250" dirty="0" spc="1" kern="0">
                 <a:solidFill>
                   <a:srgbClr val="7C93FF"/>
                 </a:solidFill>
@@ -2159,7 +2159,7 @@
               <a:t> ở</a:t>
             </a:r>
             <a:r>
-              <a:rPr lang="en-US" sz="2400" dirty="0" spc="-1" kern="0">
+              <a:rPr lang="en-US" sz="2250" dirty="0" spc="3" kern="0">
                 <a:solidFill>
                   <a:srgbClr val="7C93FF"/>
                 </a:solidFill>
@@ -2170,7 +2170,7 @@
               <a:t> tải</a:t>
             </a:r>
             <a:r>
-              <a:rPr lang="en-US" sz="2400" dirty="0" spc="-4" kern="0">
+              <a:rPr lang="en-US" sz="2250" dirty="0" spc="-2" kern="0">
                 <a:solidFill>
                   <a:srgbClr val="7C93FF"/>
                 </a:solidFill>
@@ -2178,64 +2178,9 @@
                 <a:ea typeface="Be Vietnam Pro ExtraBold" pitchFamily="34" charset="-122"/>
                 <a:cs typeface="Be Vietnam Pro ExtraBold" pitchFamily="34" charset="-120"/>
               </a:rPr>
-              <a:t> thật,</a:t>
-            </a:r>
-            <a:r>
-              <a:rPr lang="en-US" sz="2400" dirty="0" spc="-1" kern="0">
-                <a:solidFill>
-                  <a:srgbClr val="7C93FF"/>
-                </a:solidFill>
-                <a:latin typeface="Be Vietnam Pro ExtraBold" pitchFamily="34" charset="0"/>
-                <a:ea typeface="Be Vietnam Pro ExtraBold" pitchFamily="34" charset="-122"/>
-                <a:cs typeface="Be Vietnam Pro ExtraBold" pitchFamily="34" charset="-120"/>
-              </a:rPr>
-              <a:t> hai</a:t>
-            </a:r>
-            <a:r>
-              <a:rPr lang="en-US" sz="2400" dirty="0" spc="-5" kern="0">
-                <a:solidFill>
-                  <a:srgbClr val="7C93FF"/>
-                </a:solidFill>
-                <a:latin typeface="Be Vietnam Pro ExtraBold" pitchFamily="34" charset="0"/>
-                <a:ea typeface="Be Vietnam Pro ExtraBold" pitchFamily="34" charset="-122"/>
-                <a:cs typeface="Be Vietnam Pro ExtraBold" pitchFamily="34" charset="-120"/>
-              </a:rPr>
-              <a:t> phiên</a:t>
-            </a:r>
-            <a:r>
-              <a:rPr lang="en-US" sz="2400" dirty="0" spc="-1" kern="0">
-                <a:solidFill>
-                  <a:srgbClr val="7C93FF"/>
-                </a:solidFill>
-                <a:latin typeface="Be Vietnam Pro ExtraBold" pitchFamily="34" charset="0"/>
-                <a:ea typeface="Be Vietnam Pro ExtraBold" pitchFamily="34" charset="-122"/>
-                <a:cs typeface="Be Vietnam Pro ExtraBold" pitchFamily="34" charset="-120"/>
-              </a:rPr>
-              <a:t> bản</a:t>
-            </a:r>
-            <a:r>
-              <a:rPr lang="en-US" sz="2400" dirty="0" spc="0" kern="0">
-                <a:solidFill>
-                  <a:srgbClr val="7C93FF"/>
-                </a:solidFill>
-                <a:latin typeface="Be Vietnam Pro ExtraBold" pitchFamily="34" charset="0"/>
-                <a:ea typeface="Be Vietnam Pro ExtraBold" pitchFamily="34" charset="-122"/>
-                <a:cs typeface="Be Vietnam Pro ExtraBold" pitchFamily="34" charset="-120"/>
-              </a:rPr>
-              <a:t> gặp</a:t>
-            </a:r>
-            <a:r>
-              <a:rPr lang="en-US" sz="2400" dirty="0" spc="2" kern="0">
-                <a:solidFill>
-                  <a:srgbClr val="7C93FF"/>
-                </a:solidFill>
-                <a:latin typeface="Be Vietnam Pro ExtraBold" pitchFamily="34" charset="0"/>
-                <a:ea typeface="Be Vietnam Pro ExtraBold" pitchFamily="34" charset="-122"/>
-                <a:cs typeface="Be Vietnam Pro ExtraBold" pitchFamily="34" charset="-120"/>
-              </a:rPr>
-              <a:t> nhau</a:t>
-            </a:r>
-            <a:endParaRPr lang="en-US" sz="2400" dirty="0"/>
+              <a:t> thật</a:t>
+            </a:r>
+            <a:endParaRPr lang="en-US" sz="2250" dirty="0"/>
           </a:p>
         </p:txBody>
       </p:sp>
@@ -2247,8 +2192,8 @@
         </p:nvSpPr>
         <p:spPr>
           <a:xfrm>
-            <a:off x="5105400" y="5905500"/>
-            <a:ext cx="3886200" cy="2381250"/>
+            <a:off x="4267200" y="5905500"/>
+            <a:ext cx="3048000" cy="2381250"/>
           </a:xfrm>
           <a:prstGeom prst="roundRect">
             <a:avLst>
@@ -2260,7 +2205,7 @@
           </a:solidFill>
           <a:ln w="28575">
             <a:solidFill>
-              <a:srgbClr val="FFB454"/>
+              <a:srgbClr val="7C93FF"/>
             </a:solidFill>
             <a:prstDash val="solid"/>
           </a:ln>
@@ -2274,7 +2219,7 @@
         </p:nvSpPr>
         <p:spPr>
           <a:xfrm>
-            <a:off x="5372100" y="6096000"/>
+            <a:off x="4533900" y="6096000"/>
             <a:ext cx="1905000" cy="381000"/>
           </a:xfrm>
           <a:prstGeom prst="rect">
@@ -2293,7 +2238,7 @@
             <a:r>
               <a:rPr lang="en-US" sz="1950" b="1" dirty="0" spc="-5" kern="0">
                 <a:solidFill>
-                  <a:srgbClr val="FFB454"/>
+                  <a:srgbClr val="7C93FF"/>
                 </a:solidFill>
                 <a:latin typeface="Be Vietnam Pro" pitchFamily="34" charset="0"/>
                 <a:ea typeface="Be Vietnam Pro" pitchFamily="34" charset="-122"/>
@@ -2313,8 +2258,8 @@
         </p:nvSpPr>
         <p:spPr>
           <a:xfrm>
-            <a:off x="5372100" y="6572250"/>
-            <a:ext cx="3352800" cy="1524000"/>
+            <a:off x="4533900" y="6572250"/>
+            <a:ext cx="2514600" cy="1524000"/>
           </a:xfrm>
           <a:prstGeom prst="rect">
             <a:avLst/>
@@ -2330,31 +2275,31 @@
               <a:buNone/>
             </a:pPr>
             <a:r>
-              <a:rPr lang="en-US" sz="2400" dirty="0" spc="-14" kern="0">
-                <a:solidFill>
-                  <a:srgbClr val="FFB454"/>
+              <a:rPr lang="en-US" sz="2250" dirty="0" spc="0" kern="0">
+                <a:solidFill>
+                  <a:srgbClr val="7C93FF"/>
                 </a:solidFill>
                 <a:latin typeface="Be Vietnam Pro ExtraBold" pitchFamily="34" charset="0"/>
                 <a:ea typeface="Be Vietnam Pro ExtraBold" pitchFamily="34" charset="-122"/>
                 <a:cs typeface="Be Vietnam Pro ExtraBold" pitchFamily="34" charset="-120"/>
               </a:rPr>
-              <a:t>Không</a:t>
-            </a:r>
-            <a:r>
-              <a:rPr lang="en-US" sz="2400" dirty="0" spc="-4" kern="0">
-                <a:solidFill>
-                  <a:srgbClr val="FFB454"/>
+              <a:t>Hai</a:t>
+            </a:r>
+            <a:r>
+              <a:rPr lang="en-US" sz="2250" dirty="0" spc="-5" kern="0">
+                <a:solidFill>
+                  <a:srgbClr val="7C93FF"/>
                 </a:solidFill>
                 <a:latin typeface="Be Vietnam Pro ExtraBold" pitchFamily="34" charset="0"/>
                 <a:ea typeface="Be Vietnam Pro ExtraBold" pitchFamily="34" charset="-122"/>
                 <a:cs typeface="Be Vietnam Pro ExtraBold" pitchFamily="34" charset="-120"/>
               </a:rPr>
-              <a:t> biết</a:t>
-            </a:r>
-            <a:r>
-              <a:rPr lang="en-US" sz="2400" dirty="0" spc="-1" kern="0">
-                <a:solidFill>
-                  <a:srgbClr val="FFB454"/>
+              <a:t> phiên</a:t>
+            </a:r>
+            <a:r>
+              <a:rPr lang="en-US" sz="2250" dirty="0" spc="3" kern="0">
+                <a:solidFill>
+                  <a:srgbClr val="7C93FF"/>
                 </a:solidFill>
                 <a:latin typeface="Be Vietnam Pro ExtraBold" pitchFamily="34" charset="0"/>
                 <a:ea typeface="Be Vietnam Pro ExtraBold" pitchFamily="34" charset="-122"/>
@@ -2363,50 +2308,28 @@
               <a:t> bản</a:t>
             </a:r>
             <a:r>
-              <a:rPr lang="en-US" sz="2400" dirty="0" spc="2" kern="0">
-                <a:solidFill>
-                  <a:srgbClr val="FFB454"/>
+              <a:rPr lang="en-US" sz="2250" dirty="0" spc="0" kern="0">
+                <a:solidFill>
+                  <a:srgbClr val="7C93FF"/>
                 </a:solidFill>
                 <a:latin typeface="Be Vietnam Pro ExtraBold" pitchFamily="34" charset="0"/>
                 <a:ea typeface="Be Vietnam Pro ExtraBold" pitchFamily="34" charset="-122"/>
                 <a:cs typeface="Be Vietnam Pro ExtraBold" pitchFamily="34" charset="-120"/>
               </a:rPr>
-              <a:t> mới</a:t>
-            </a:r>
-            <a:r>
-              <a:rPr lang="en-US" sz="2400" dirty="0" spc="-11" kern="0">
-                <a:solidFill>
-                  <a:srgbClr val="FFB454"/>
+              <a:t> gặp</a:t>
+            </a:r>
+            <a:r>
+              <a:rPr lang="en-US" sz="2250" dirty="0" spc="4" kern="0">
+                <a:solidFill>
+                  <a:srgbClr val="7C93FF"/>
                 </a:solidFill>
                 <a:latin typeface="Be Vietnam Pro ExtraBold" pitchFamily="34" charset="0"/>
                 <a:ea typeface="Be Vietnam Pro ExtraBold" pitchFamily="34" charset="-122"/>
                 <a:cs typeface="Be Vietnam Pro ExtraBold" pitchFamily="34" charset="-120"/>
               </a:rPr>
-              <a:t> tốt</a:t>
-            </a:r>
-            <a:r>
-              <a:rPr lang="en-US" sz="2400" dirty="0" spc="-7" kern="0">
-                <a:solidFill>
-                  <a:srgbClr val="FFB454"/>
-                </a:solidFill>
-                <a:latin typeface="Be Vietnam Pro ExtraBold" pitchFamily="34" charset="0"/>
-                <a:ea typeface="Be Vietnam Pro ExtraBold" pitchFamily="34" charset="-122"/>
-                <a:cs typeface="Be Vietnam Pro ExtraBold" pitchFamily="34" charset="-120"/>
-              </a:rPr>
-              <a:t> hay</a:t>
-            </a:r>
-            <a:r>
-              <a:rPr lang="en-US" sz="2400" dirty="0" spc="-17" kern="0">
-                <a:solidFill>
-                  <a:srgbClr val="FFB454"/>
-                </a:solidFill>
-                <a:latin typeface="Be Vietnam Pro ExtraBold" pitchFamily="34" charset="0"/>
-                <a:ea typeface="Be Vietnam Pro ExtraBold" pitchFamily="34" charset="-122"/>
-                <a:cs typeface="Be Vietnam Pro ExtraBold" pitchFamily="34" charset="-120"/>
-              </a:rPr>
-              <a:t> xấu</a:t>
-            </a:r>
-            <a:endParaRPr lang="en-US" sz="2400" dirty="0"/>
+              <a:t> nhau</a:t>
+            </a:r>
+            <a:endParaRPr lang="en-US" sz="2250" dirty="0"/>
           </a:p>
         </p:txBody>
       </p:sp>
@@ -2418,8 +2341,8 @@
         </p:nvSpPr>
         <p:spPr>
           <a:xfrm>
-            <a:off x="9296400" y="5905500"/>
-            <a:ext cx="3886200" cy="2381250"/>
+            <a:off x="7620000" y="5905500"/>
+            <a:ext cx="3048000" cy="2381250"/>
           </a:xfrm>
           <a:prstGeom prst="roundRect">
             <a:avLst>
@@ -2431,7 +2354,7 @@
           </a:solidFill>
           <a:ln w="28575">
             <a:solidFill>
-              <a:srgbClr val="3DD6A0"/>
+              <a:srgbClr val="FFB454"/>
             </a:solidFill>
             <a:prstDash val="solid"/>
           </a:ln>
@@ -2445,7 +2368,7 @@
         </p:nvSpPr>
         <p:spPr>
           <a:xfrm>
-            <a:off x="9563100" y="6096000"/>
+            <a:off x="7886700" y="6096000"/>
             <a:ext cx="1905000" cy="381000"/>
           </a:xfrm>
           <a:prstGeom prst="rect">
@@ -2464,7 +2387,7 @@
             <a:r>
               <a:rPr lang="en-US" sz="1950" b="1" dirty="0" spc="1" kern="0">
                 <a:solidFill>
-                  <a:srgbClr val="3DD6A0"/>
+                  <a:srgbClr val="FFB454"/>
                 </a:solidFill>
                 <a:latin typeface="Be Vietnam Pro" pitchFamily="34" charset="0"/>
                 <a:ea typeface="Be Vietnam Pro" pitchFamily="34" charset="-122"/>
@@ -2484,8 +2407,8 @@
         </p:nvSpPr>
         <p:spPr>
           <a:xfrm>
-            <a:off x="9563100" y="6572250"/>
-            <a:ext cx="3352800" cy="1524000"/>
+            <a:off x="7886700" y="6572250"/>
+            <a:ext cx="2514600" cy="1524000"/>
           </a:xfrm>
           <a:prstGeom prst="rect">
             <a:avLst/>
@@ -2501,50 +2424,83 @@
               <a:buNone/>
             </a:pPr>
             <a:r>
-              <a:rPr lang="en-US" sz="2400" dirty="0" spc="-45" kern="0">
-                <a:solidFill>
-                  <a:srgbClr val="3DD6A0"/>
+              <a:rPr lang="en-US" sz="2250" dirty="0" spc="-11" kern="0">
+                <a:solidFill>
+                  <a:srgbClr val="FFB454"/>
                 </a:solidFill>
                 <a:latin typeface="Be Vietnam Pro ExtraBold" pitchFamily="34" charset="0"/>
                 <a:ea typeface="Be Vietnam Pro ExtraBold" pitchFamily="34" charset="-122"/>
                 <a:cs typeface="Be Vietnam Pro ExtraBold" pitchFamily="34" charset="-120"/>
               </a:rPr>
-              <a:t>Rút</a:t>
-            </a:r>
-            <a:r>
-              <a:rPr lang="en-US" sz="2400" dirty="0" spc="-2" kern="0">
-                <a:solidFill>
-                  <a:srgbClr val="3DD6A0"/>
+              <a:t>Không</a:t>
+            </a:r>
+            <a:r>
+              <a:rPr lang="en-US" sz="2250" dirty="0" spc="-3" kern="0">
+                <a:solidFill>
+                  <a:srgbClr val="FFB454"/>
                 </a:solidFill>
                 <a:latin typeface="Be Vietnam Pro ExtraBold" pitchFamily="34" charset="0"/>
                 <a:ea typeface="Be Vietnam Pro ExtraBold" pitchFamily="34" charset="-122"/>
                 <a:cs typeface="Be Vietnam Pro ExtraBold" pitchFamily="34" charset="-120"/>
               </a:rPr>
-              <a:t> lại</a:t>
-            </a:r>
-            <a:r>
-              <a:rPr lang="en-US" sz="2400" dirty="0" spc="3" kern="0">
-                <a:solidFill>
-                  <a:srgbClr val="3DD6A0"/>
+              <a:t> biết</a:t>
+            </a:r>
+            <a:r>
+              <a:rPr lang="en-US" sz="2250" dirty="0" spc="2" kern="0">
+                <a:solidFill>
+                  <a:srgbClr val="FFB454"/>
                 </a:solidFill>
                 <a:latin typeface="Be Vietnam Pro ExtraBold" pitchFamily="34" charset="0"/>
                 <a:ea typeface="Be Vietnam Pro ExtraBold" pitchFamily="34" charset="-122"/>
                 <a:cs typeface="Be Vietnam Pro ExtraBold" pitchFamily="34" charset="-120"/>
               </a:rPr>
-              <a:t> quá</a:t>
-            </a:r>
-            <a:r>
-              <a:rPr lang="en-US" sz="2400" dirty="0" spc="0" kern="0">
-                <a:solidFill>
-                  <a:srgbClr val="3DD6A0"/>
+              <a:t> bản</a:t>
+            </a:r>
+            <a:r>
+              <a:rPr lang="en-US" sz="2250" dirty="0" spc="5" kern="0">
+                <a:solidFill>
+                  <a:srgbClr val="FFB454"/>
                 </a:solidFill>
                 <a:latin typeface="Be Vietnam Pro ExtraBold" pitchFamily="34" charset="0"/>
                 <a:ea typeface="Be Vietnam Pro ExtraBold" pitchFamily="34" charset="-122"/>
                 <a:cs typeface="Be Vietnam Pro ExtraBold" pitchFamily="34" charset="-120"/>
               </a:rPr>
-              <a:t> chậm</a:t>
-            </a:r>
-            <a:endParaRPr lang="en-US" sz="2400" dirty="0"/>
+              <a:t> mới</a:t>
+            </a:r>
+            <a:r>
+              <a:rPr lang="en-US" sz="2250" dirty="0" spc="-5" kern="0">
+                <a:solidFill>
+                  <a:srgbClr val="FFB454"/>
+                </a:solidFill>
+                <a:latin typeface="Be Vietnam Pro ExtraBold" pitchFamily="34" charset="0"/>
+                <a:ea typeface="Be Vietnam Pro ExtraBold" pitchFamily="34" charset="-122"/>
+                <a:cs typeface="Be Vietnam Pro ExtraBold" pitchFamily="34" charset="-120"/>
+              </a:rPr>
+              <a:t> tốt</a:t>
+            </a:r>
+            <a:r>
+              <a:rPr lang="en-US" sz="2250" dirty="0" spc="-7" kern="0">
+                <a:solidFill>
+                  <a:srgbClr val="FFB454"/>
+                </a:solidFill>
+                <a:latin typeface="Be Vietnam Pro ExtraBold" pitchFamily="34" charset="0"/>
+                <a:ea typeface="Be Vietnam Pro ExtraBold" pitchFamily="34" charset="-122"/>
+                <a:cs typeface="Be Vietnam Pro ExtraBold" pitchFamily="34" charset="-120"/>
+              </a:rPr>
+              <a:t> hay</a:t>
+            </a:r>
+            <a:r>
+              <a:rPr lang="en-US" sz="2250" dirty="0" spc="-14" kern="0">
+                <a:solidFill>
+                  <a:srgbClr val="FFB454"/>
+                </a:solidFill>
+                <a:latin typeface="Be Vietnam Pro ExtraBold" pitchFamily="34" charset="0"/>
+                <a:ea typeface="Be Vietnam Pro ExtraBold" pitchFamily="34" charset="-122"/>
+                <a:cs typeface="Be Vietnam Pro ExtraBold" pitchFamily="34" charset="-120"/>
+              </a:rPr>
+              <a:t> xấu</a:t>
+            </a:r>
+            <a:endParaRPr lang="en-US" sz="2250" dirty="0"/>
           </a:p>
         </p:txBody>
       </p:sp>
@@ -2556,8 +2512,8 @@
         </p:nvSpPr>
         <p:spPr>
           <a:xfrm>
-            <a:off x="13487400" y="5905500"/>
-            <a:ext cx="3886200" cy="2381250"/>
+            <a:off x="10972800" y="5905500"/>
+            <a:ext cx="3048000" cy="2381250"/>
           </a:xfrm>
           <a:prstGeom prst="roundRect">
             <a:avLst>
@@ -2569,7 +2525,7 @@
           </a:solidFill>
           <a:ln w="28575">
             <a:solidFill>
-              <a:srgbClr val="FF6A4D"/>
+              <a:srgbClr val="3DD6A0"/>
             </a:solidFill>
             <a:prstDash val="solid"/>
           </a:ln>
@@ -2583,7 +2539,7 @@
         </p:nvSpPr>
         <p:spPr>
           <a:xfrm>
-            <a:off x="13754100" y="6096000"/>
+            <a:off x="11239500" y="6096000"/>
             <a:ext cx="1905000" cy="381000"/>
           </a:xfrm>
           <a:prstGeom prst="rect">
@@ -2602,7 +2558,7 @@
             <a:r>
               <a:rPr lang="en-US" sz="1950" b="1" dirty="0" spc="4" kern="0">
                 <a:solidFill>
-                  <a:srgbClr val="FF6A4D"/>
+                  <a:srgbClr val="3DD6A0"/>
                 </a:solidFill>
                 <a:latin typeface="Be Vietnam Pro" pitchFamily="34" charset="0"/>
                 <a:ea typeface="Be Vietnam Pro" pitchFamily="34" charset="-122"/>
@@ -2622,8 +2578,8 @@
         </p:nvSpPr>
         <p:spPr>
           <a:xfrm>
-            <a:off x="13754100" y="6572250"/>
-            <a:ext cx="3352800" cy="1524000"/>
+            <a:off x="11239500" y="6572250"/>
+            <a:ext cx="2514600" cy="1524000"/>
           </a:xfrm>
           <a:prstGeom prst="rect">
             <a:avLst/>
@@ -2639,51 +2595,145 @@
               <a:buNone/>
             </a:pPr>
             <a:r>
-              <a:rPr lang="en-US" sz="2400" dirty="0" spc="-8" kern="0">
-                <a:solidFill>
-                  <a:srgbClr val="FF6A4D"/>
+              <a:rPr lang="en-US" sz="2250" dirty="0" spc="-44" kern="0">
+                <a:solidFill>
+                  <a:srgbClr val="3DD6A0"/>
                 </a:solidFill>
                 <a:latin typeface="Be Vietnam Pro ExtraBold" pitchFamily="34" charset="0"/>
                 <a:ea typeface="Be Vietnam Pro ExtraBold" pitchFamily="34" charset="-122"/>
                 <a:cs typeface="Be Vietnam Pro ExtraBold" pitchFamily="34" charset="-120"/>
               </a:rPr>
-              <a:t>Thay</a:t>
-            </a:r>
-            <a:r>
-              <a:rPr lang="en-US" sz="2400" dirty="0" spc="1" kern="0">
-                <a:solidFill>
-                  <a:srgbClr val="FF6A4D"/>
+              <a:t>Rút</a:t>
+            </a:r>
+            <a:r>
+              <a:rPr lang="en-US" sz="2250" dirty="0" spc="-1" kern="0">
+                <a:solidFill>
+                  <a:srgbClr val="3DD6A0"/>
                 </a:solidFill>
                 <a:latin typeface="Be Vietnam Pro ExtraBold" pitchFamily="34" charset="0"/>
                 <a:ea typeface="Be Vietnam Pro ExtraBold" pitchFamily="34" charset="-122"/>
                 <a:cs typeface="Be Vietnam Pro ExtraBold" pitchFamily="34" charset="-120"/>
               </a:rPr>
-              <a:t> đổi</a:t>
-            </a:r>
-            <a:r>
-              <a:rPr lang="en-US" sz="2400" dirty="0" spc="-4" kern="0">
-                <a:solidFill>
-                  <a:srgbClr val="FF6A4D"/>
+              <a:t> lại</a:t>
+            </a:r>
+            <a:r>
+              <a:rPr lang="en-US" sz="2250" dirty="0" spc="3" kern="0">
+                <a:solidFill>
+                  <a:srgbClr val="3DD6A0"/>
                 </a:solidFill>
                 <a:latin typeface="Be Vietnam Pro ExtraBold" pitchFamily="34" charset="0"/>
                 <a:ea typeface="Be Vietnam Pro ExtraBold" pitchFamily="34" charset="-122"/>
                 <a:cs typeface="Be Vietnam Pro ExtraBold" pitchFamily="34" charset="-120"/>
               </a:rPr>
-              <a:t> gói</a:t>
-            </a:r>
-            <a:r>
-              <a:rPr lang="en-US" sz="2400" dirty="0" spc="2" kern="0">
-                <a:solidFill>
-                  <a:srgbClr val="FF6A4D"/>
+              <a:t> quá</a:t>
+            </a:r>
+            <a:r>
+              <a:rPr lang="en-US" sz="2250" dirty="0" spc="1" kern="0">
+                <a:solidFill>
+                  <a:srgbClr val="3DD6A0"/>
                 </a:solidFill>
                 <a:latin typeface="Be Vietnam Pro ExtraBold" pitchFamily="34" charset="0"/>
                 <a:ea typeface="Be Vietnam Pro ExtraBold" pitchFamily="34" charset="-122"/>
                 <a:cs typeface="Be Vietnam Pro ExtraBold" pitchFamily="34" charset="-120"/>
               </a:rPr>
-              <a:t> quá</a:t>
-            </a:r>
-            <a:r>
-              <a:rPr lang="en-US" sz="2400" dirty="0" spc="-5" kern="0">
+              <a:t> chậm</a:t>
+            </a:r>
+            <a:endParaRPr lang="en-US" sz="2250" dirty="0"/>
+          </a:p>
+        </p:txBody>
+      </p:sp>
+      <p:sp>
+        <p:nvSpPr>
+          <p:cNvPr id="17" name="Shape 15"/>
+          <p:cNvSpPr/>
+          <p:nvPr/>
+        </p:nvSpPr>
+        <p:spPr>
+          <a:xfrm>
+            <a:off x="14325600" y="5905500"/>
+            <a:ext cx="3048000" cy="2381250"/>
+          </a:xfrm>
+          <a:prstGeom prst="roundRect">
+            <a:avLst>
+              <a:gd name="adj" fmla="val 8000"/>
+            </a:avLst>
+          </a:prstGeom>
+          <a:solidFill>
+            <a:srgbClr val="1E212B"/>
+          </a:solidFill>
+          <a:ln w="28575">
+            <a:solidFill>
+              <a:srgbClr val="FF6A4D"/>
+            </a:solidFill>
+            <a:prstDash val="solid"/>
+          </a:ln>
+        </p:spPr>
+      </p:sp>
+      <p:sp>
+        <p:nvSpPr>
+          <p:cNvPr id="18" name="Text 16"/>
+          <p:cNvSpPr/>
+          <p:nvPr/>
+        </p:nvSpPr>
+        <p:spPr>
+          <a:xfrm>
+            <a:off x="14592300" y="6096000"/>
+            <a:ext cx="1905000" cy="381000"/>
+          </a:xfrm>
+          <a:prstGeom prst="rect">
+            <a:avLst/>
+          </a:prstGeom>
+          <a:noFill/>
+          <a:ln/>
+        </p:spPr>
+        <p:txBody>
+          <a:bodyPr wrap="square" lIns="0" tIns="0" rIns="0" bIns="0" rtlCol="0" anchor="t"/>
+          <a:lstStyle/>
+          <a:p>
+            <a:pPr algn="l" indent="0" marL="0">
+              <a:buNone/>
+            </a:pPr>
+            <a:r>
+              <a:rPr lang="en-US" sz="1950" b="1" dirty="0" spc="5" kern="0">
+                <a:solidFill>
+                  <a:srgbClr val="FF6A4D"/>
+                </a:solidFill>
+                <a:latin typeface="Be Vietnam Pro" pitchFamily="34" charset="0"/>
+                <a:ea typeface="Be Vietnam Pro" pitchFamily="34" charset="-122"/>
+                <a:cs typeface="Be Vietnam Pro" pitchFamily="34" charset="-120"/>
+              </a:rPr>
+              <a:t>5</a:t>
+            </a:r>
+            <a:endParaRPr lang="en-US" sz="1950" dirty="0"/>
+          </a:p>
+        </p:txBody>
+      </p:sp>
+      <p:sp>
+        <p:nvSpPr>
+          <p:cNvPr id="19" name="Text 17"/>
+          <p:cNvSpPr/>
+          <p:nvPr/>
+        </p:nvSpPr>
+        <p:spPr>
+          <a:xfrm>
+            <a:off x="14592300" y="6572250"/>
+            <a:ext cx="2514600" cy="1524000"/>
+          </a:xfrm>
+          <a:prstGeom prst="rect">
+            <a:avLst/>
+          </a:prstGeom>
+          <a:noFill/>
+          <a:ln/>
+        </p:spPr>
+        <p:txBody>
+          <a:bodyPr wrap="square" lIns="0" tIns="0" rIns="0" bIns="0" rtlCol="0" anchor="ctr"/>
+          <a:lstStyle/>
+          <a:p>
+            <a:pPr algn="l" indent="0" marL="0">
+              <a:buNone/>
+            </a:pPr>
+            <a:r>
+              <a:rPr lang="en-US" sz="2250" dirty="0" spc="-10" kern="0">
                 <a:solidFill>
                   <a:srgbClr val="FF6A4D"/>
                 </a:solidFill>
@@ -2691,15 +2741,59 @@
                 <a:ea typeface="Be Vietnam Pro ExtraBold" pitchFamily="34" charset="-122"/>
                 <a:cs typeface="Be Vietnam Pro ExtraBold" pitchFamily="34" charset="-120"/>
               </a:rPr>
+              <a:t>Thay</a:t>
+            </a:r>
+            <a:r>
+              <a:rPr lang="en-US" sz="2250" dirty="0" spc="2" kern="0">
+                <a:solidFill>
+                  <a:srgbClr val="FF6A4D"/>
+                </a:solidFill>
+                <a:latin typeface="Be Vietnam Pro ExtraBold" pitchFamily="34" charset="0"/>
+                <a:ea typeface="Be Vietnam Pro ExtraBold" pitchFamily="34" charset="-122"/>
+                <a:cs typeface="Be Vietnam Pro ExtraBold" pitchFamily="34" charset="-120"/>
+              </a:rPr>
+              <a:t> đổi</a:t>
+            </a:r>
+            <a:r>
+              <a:rPr lang="en-US" sz="2250" dirty="0" spc="-3" kern="0">
+                <a:solidFill>
+                  <a:srgbClr val="FF6A4D"/>
+                </a:solidFill>
+                <a:latin typeface="Be Vietnam Pro ExtraBold" pitchFamily="34" charset="0"/>
+                <a:ea typeface="Be Vietnam Pro ExtraBold" pitchFamily="34" charset="-122"/>
+                <a:cs typeface="Be Vietnam Pro ExtraBold" pitchFamily="34" charset="-120"/>
+              </a:rPr>
+              <a:t> gói</a:t>
+            </a:r>
+            <a:r>
+              <a:rPr lang="en-US" sz="2250" dirty="0" spc="3" kern="0">
+                <a:solidFill>
+                  <a:srgbClr val="FF6A4D"/>
+                </a:solidFill>
+                <a:latin typeface="Be Vietnam Pro ExtraBold" pitchFamily="34" charset="0"/>
+                <a:ea typeface="Be Vietnam Pro ExtraBold" pitchFamily="34" charset="-122"/>
+                <a:cs typeface="Be Vietnam Pro ExtraBold" pitchFamily="34" charset="-120"/>
+              </a:rPr>
+              <a:t> quá</a:t>
+            </a:r>
+            <a:r>
+              <a:rPr lang="en-US" sz="2250" dirty="0" spc="-3" kern="0">
+                <a:solidFill>
+                  <a:srgbClr val="FF6A4D"/>
+                </a:solidFill>
+                <a:latin typeface="Be Vietnam Pro ExtraBold" pitchFamily="34" charset="0"/>
+                <a:ea typeface="Be Vietnam Pro ExtraBold" pitchFamily="34" charset="-122"/>
+                <a:cs typeface="Be Vietnam Pro ExtraBold" pitchFamily="34" charset="-120"/>
+              </a:rPr>
               <a:t> lớn</a:t>
             </a:r>
-            <a:endParaRPr lang="en-US" sz="2400" dirty="0"/>
+            <a:endParaRPr lang="en-US" sz="2250" dirty="0"/>
           </a:p>
         </p:txBody>
       </p:sp>
       <p:sp>
         <p:nvSpPr>
-          <p:cNvPr id="17" name="Shape 15"/>
+          <p:cNvPr id="20" name="Shape 18"/>
           <p:cNvSpPr/>
           <p:nvPr/>
         </p:nvSpPr>
@@ -2723,7 +2817,7 @@
       </p:sp>
       <p:pic>
         <p:nvPicPr>
-          <p:cNvPr id="18" name="Moda image moda-export-watermark-884ac12d-6f81-47a4-b357-195d07cb003c" descr="">    </p:cNvPr>
+          <p:cNvPr id="21" name="Moda image moda-export-watermark-884ac12d-6f81-47a4-b357-195d07cb003c" descr="">    </p:cNvPr>
           <p:cNvPicPr>
             <a:picLocks noChangeAspect="1"/>
           </p:cNvPicPr>
@@ -5127,6 +5221,28 @@
               </a:rPr>
               <a:t> 1</a:t>
             </a:r>
+            <a:r>
+              <a:rPr lang="en-US" sz="1950" b="1" spc="249" kern="0" dirty="0">
+                <a:solidFill>
+                  <a:srgbClr val="1F3FD1"/>
+                </a:solidFill>
+                <a:latin typeface="Be Vietnam Pro" pitchFamily="34" charset="0"/>
+                <a:ea typeface="Be Vietnam Pro" pitchFamily="34" charset="-122"/>
+                <a:cs typeface="Be Vietnam Pro" pitchFamily="34" charset="-120"/>
+              </a:rPr>
+              <a:t> VÀ</a:t>
+            </a:r>
+            <a:r>
+              <a:rPr lang="en-US" sz="1950" b="1" spc="297" kern="0" dirty="0">
+                <a:solidFill>
+                  <a:srgbClr val="1F3FD1"/>
+                </a:solidFill>
+                <a:latin typeface="Be Vietnam Pro" pitchFamily="34" charset="0"/>
+                <a:ea typeface="Be Vietnam Pro" pitchFamily="34" charset="-122"/>
+                <a:cs typeface="Be Vietnam Pro" pitchFamily="34" charset="-120"/>
+              </a:rPr>
+              <a:t> 2</a:t>
+            </a:r>
             <a:endParaRPr lang="en-US" sz="1950" dirty="0"/>
           </a:p>
         </p:txBody>
@@ -5261,7 +5377,7 @@
               <a:buNone/>
             </a:pPr>
             <a:r>
-              <a:rPr lang="en-US" sz="1950" b="1" spc="198" kern="0" dirty="0">
+              <a:rPr lang="en-US" sz="1950" b="1" spc="212" kern="0" dirty="0">
                 <a:solidFill>
                   <a:srgbClr val="6B6A66"/>
                 </a:solidFill>
@@ -5269,7 +5385,18 @@
                 <a:ea typeface="Be Vietnam Pro" pitchFamily="34" charset="-122"/>
                 <a:cs typeface="Be Vietnam Pro" pitchFamily="34" charset="-120"/>
               </a:rPr>
-              <a:t>LỖI</a:t>
+              <a:t>RỦI</a:t>
+            </a:r>
+            <a:r>
+              <a:rPr lang="en-US" sz="1950" b="1" spc="205" kern="0" dirty="0">
+                <a:solidFill>
+                  <a:srgbClr val="6B6A66"/>
+                </a:solidFill>
+                <a:latin typeface="Be Vietnam Pro" pitchFamily="34" charset="0"/>
+                <a:ea typeface="Be Vietnam Pro" pitchFamily="34" charset="-122"/>
+                <a:cs typeface="Be Vietnam Pro" pitchFamily="34" charset="-120"/>
+              </a:rPr>
+              <a:t> RO</a:t>
             </a:r>
             <a:r>
               <a:rPr lang="en-US" sz="1950" b="1" spc="226" kern="0" dirty="0">
@@ -5280,10 +5407,43 @@
                 <a:ea typeface="Be Vietnam Pro" pitchFamily="34" charset="-122"/>
                 <a:cs typeface="Be Vietnam Pro" pitchFamily="34" charset="-120"/>
               </a:rPr>
+              <a:t> 1</a:t>
+            </a:r>
+            <a:r>
+              <a:rPr lang="en-US" sz="1950" b="1" spc="221" kern="0" dirty="0">
+                <a:solidFill>
+                  <a:srgbClr val="6B6A66"/>
+                </a:solidFill>
+                <a:latin typeface="Be Vietnam Pro" pitchFamily="34" charset="0"/>
+                <a:ea typeface="Be Vietnam Pro" pitchFamily="34" charset="-122"/>
+                <a:cs typeface="Be Vietnam Pro" pitchFamily="34" charset="-120"/>
+              </a:rPr>
+              <a:t> ·</a:t>
+            </a:r>
+            <a:r>
+              <a:rPr lang="en-US" sz="1950" b="1" spc="205" kern="0" dirty="0">
+                <a:solidFill>
+                  <a:srgbClr val="6B6A66"/>
+                </a:solidFill>
+                <a:latin typeface="Be Vietnam Pro" pitchFamily="34" charset="0"/>
+                <a:ea typeface="Be Vietnam Pro" pitchFamily="34" charset="-122"/>
+                <a:cs typeface="Be Vietnam Pro" pitchFamily="34" charset="-120"/>
+              </a:rPr>
+              <a:t> LỖI</a:t>
+            </a:r>
+            <a:r>
+              <a:rPr lang="en-US" sz="1950" b="1" spc="225" kern="0" dirty="0">
+                <a:solidFill>
+                  <a:srgbClr val="6B6A66"/>
+                </a:solidFill>
+                <a:latin typeface="Be Vietnam Pro" pitchFamily="34" charset="0"/>
+                <a:ea typeface="Be Vietnam Pro" pitchFamily="34" charset="-122"/>
+                <a:cs typeface="Be Vietnam Pro" pitchFamily="34" charset="-120"/>
+              </a:rPr>
               <a:t> CHỈ</a:t>
             </a:r>
             <a:r>
-              <a:rPr lang="en-US" sz="1950" b="1" spc="196" kern="0" dirty="0">
+              <a:rPr lang="en-US" sz="1950" b="1" spc="197" kern="0" dirty="0">
                 <a:solidFill>
                   <a:srgbClr val="6B6A66"/>
                 </a:solidFill>
@@ -5294,7 +5454,7 @@
               <a:t> LỘ</a:t>
             </a:r>
             <a:r>
-              <a:rPr lang="en-US" sz="1950" b="1" spc="226" kern="0" dirty="0">
+              <a:rPr lang="en-US" sz="1950" b="1" spc="225" kern="0" dirty="0">
                 <a:solidFill>
                   <a:srgbClr val="6B6A66"/>
                 </a:solidFill>
@@ -5305,7 +5465,7 @@
               <a:t> Ở</a:t>
             </a:r>
             <a:r>
-              <a:rPr lang="en-US" sz="1950" b="1" spc="177" kern="0" dirty="0">
+              <a:rPr lang="en-US" sz="1950" b="1" spc="178" kern="0" dirty="0">
                 <a:solidFill>
                   <a:srgbClr val="6B6A66"/>
                 </a:solidFill>
@@ -5316,7 +5476,7 @@
               <a:t> TẢI</a:t>
             </a:r>
             <a:r>
-              <a:rPr lang="en-US" sz="1950" b="1" spc="186" kern="0" dirty="0">
+              <a:rPr lang="en-US" sz="1950" b="1" spc="185" kern="0" dirty="0">
                 <a:solidFill>
                   <a:srgbClr val="6B6A66"/>
                 </a:solidFill>
@@ -5567,7 +5727,7 @@
               <a:buNone/>
             </a:pPr>
             <a:r>
-              <a:rPr lang="en-US" sz="1950" b="1" spc="227" kern="0" dirty="0">
+              <a:rPr lang="en-US" sz="1950" b="1" spc="212" kern="0" dirty="0">
                 <a:solidFill>
                   <a:srgbClr val="6B6A66"/>
                 </a:solidFill>
@@ -5575,7 +5735,51 @@
                 <a:ea typeface="Be Vietnam Pro" pitchFamily="34" charset="-122"/>
                 <a:cs typeface="Be Vietnam Pro" pitchFamily="34" charset="-120"/>
               </a:rPr>
-              <a:t>HAI</a:t>
+              <a:t>RỦI</a:t>
+            </a:r>
+            <a:r>
+              <a:rPr lang="en-US" sz="1950" b="1" spc="205" kern="0" dirty="0">
+                <a:solidFill>
+                  <a:srgbClr val="6B6A66"/>
+                </a:solidFill>
+                <a:latin typeface="Be Vietnam Pro" pitchFamily="34" charset="0"/>
+                <a:ea typeface="Be Vietnam Pro" pitchFamily="34" charset="-122"/>
+                <a:cs typeface="Be Vietnam Pro" pitchFamily="34" charset="-120"/>
+              </a:rPr>
+              <a:t> RO</a:t>
+            </a:r>
+            <a:r>
+              <a:rPr lang="en-US" sz="1950" b="1" spc="222" kern="0" dirty="0">
+                <a:solidFill>
+                  <a:srgbClr val="6B6A66"/>
+                </a:solidFill>
+                <a:latin typeface="Be Vietnam Pro" pitchFamily="34" charset="0"/>
+                <a:ea typeface="Be Vietnam Pro" pitchFamily="34" charset="-122"/>
+                <a:cs typeface="Be Vietnam Pro" pitchFamily="34" charset="-120"/>
+              </a:rPr>
+              <a:t> 2</a:t>
+            </a:r>
+            <a:r>
+              <a:rPr lang="en-US" sz="1950" b="1" spc="221" kern="0" dirty="0">
+                <a:solidFill>
+                  <a:srgbClr val="6B6A66"/>
+                </a:solidFill>
+                <a:latin typeface="Be Vietnam Pro" pitchFamily="34" charset="0"/>
+                <a:ea typeface="Be Vietnam Pro" pitchFamily="34" charset="-122"/>
+                <a:cs typeface="Be Vietnam Pro" pitchFamily="34" charset="-120"/>
+              </a:rPr>
+              <a:t> ·</a:t>
+            </a:r>
+            <a:r>
+              <a:rPr lang="en-US" sz="1950" b="1" spc="226" kern="0" dirty="0">
+                <a:solidFill>
+                  <a:srgbClr val="6B6A66"/>
+                </a:solidFill>
+                <a:latin typeface="Be Vietnam Pro" pitchFamily="34" charset="0"/>
+                <a:ea typeface="Be Vietnam Pro" pitchFamily="34" charset="-122"/>
+                <a:cs typeface="Be Vietnam Pro" pitchFamily="34" charset="-120"/>
+              </a:rPr>
+              <a:t> HAI</a:t>
             </a:r>
             <a:r>
               <a:rPr lang="en-US" sz="1950" b="1" spc="225" kern="0" dirty="0">
@@ -6268,7 +6472,7 @@
               <a:t> RO</a:t>
             </a:r>
             <a:r>
-              <a:rPr lang="en-US" sz="1950" b="1" spc="297" kern="0" dirty="0">
+              <a:rPr lang="en-US" sz="1950" b="1" spc="300" kern="0" dirty="0">
                 <a:solidFill>
                   <a:srgbClr val="FFB454"/>
                 </a:solidFill>
@@ -6276,7 +6480,7 @@
                 <a:ea typeface="Be Vietnam Pro" pitchFamily="34" charset="-122"/>
                 <a:cs typeface="Be Vietnam Pro" pitchFamily="34" charset="-120"/>
               </a:rPr>
-              <a:t> 2</a:t>
+              <a:t> 3</a:t>
             </a:r>
             <a:endParaRPr lang="en-US" sz="1950" dirty="0"/>
           </a:p>
@@ -7299,7 +7503,7 @@
               <a:t> RO</a:t>
             </a:r>
             <a:r>
-              <a:rPr lang="en-US" sz="1950" b="1" spc="300" kern="0" dirty="0">
+              <a:rPr lang="en-US" sz="1950" b="1" spc="301" kern="0" dirty="0">
                 <a:solidFill>
                   <a:srgbClr val="0F766E"/>
                 </a:solidFill>
@@ -7307,7 +7511,7 @@
                 <a:ea typeface="Be Vietnam Pro" pitchFamily="34" charset="-122"/>
                 <a:cs typeface="Be Vietnam Pro" pitchFamily="34" charset="-120"/>
               </a:rPr>
-              <a:t> 3</a:t>
+              <a:t> 4</a:t>
             </a:r>
             <a:endParaRPr lang="en-US" sz="1950" dirty="0"/>
           </a:p>
@@ -8136,7 +8340,7 @@
               <a:t> RO</a:t>
             </a:r>
             <a:r>
-              <a:rPr lang="en-US" sz="1950" b="1" spc="301" kern="0" dirty="0">
+              <a:rPr lang="en-US" sz="1950" b="1" spc="302" kern="0" dirty="0">
                 <a:solidFill>
                   <a:srgbClr val="FF6A4D"/>
                 </a:solidFill>
@@ -8144,7 +8348,7 @@
                 <a:ea typeface="Be Vietnam Pro" pitchFamily="34" charset="-122"/>
                 <a:cs typeface="Be Vietnam Pro" pitchFamily="34" charset="-120"/>
               </a:rPr>
-              <a:t> 4</a:t>
+              <a:t> 5</a:t>
             </a:r>
             <a:endParaRPr lang="en-US" sz="1950" dirty="0"/>
           </a:p>

--- a/system-design-101/vi/lessons/sd-13-020/slides/sd-13-020.pptx
+++ b/system-design-101/vi/lessons/sd-13-020/slides/sd-13-020.pptx
@@ -10581,8 +10581,8 @@
         </p:nvSpPr>
         <p:spPr>
           <a:xfrm>
-            <a:off x="914400" y="2238375"/>
-            <a:ext cx="16459200" cy="1143000"/>
+            <a:off x="914400" y="2047875"/>
+            <a:ext cx="16459200" cy="1619250"/>
           </a:xfrm>
           <a:prstGeom prst="rect">
             <a:avLst/>
@@ -10685,8 +10685,14 @@
               </a:rPr>
               <a:t> được.</a:t>
             </a:r>
-            <a:r>
-              <a:rPr lang="en-US" sz="2850" dirty="0" spc="-6" kern="0">
+            <a:endParaRPr lang="en-US" sz="2850" dirty="0"/>
+          </a:p>
+          <a:p>
+            <a:pPr algn="l" indent="0" marL="0">
+              <a:buNone/>
+            </a:pPr>
+            <a:r>
+              <a:rPr lang="en-US" sz="2850" dirty="0" spc="-9" kern="0">
                 <a:solidFill>
                   <a:srgbClr val="E4E1D8"/>
                 </a:solidFill>
@@ -10694,7 +10700,7 @@
                 <a:ea typeface="Be Vietnam Pro SemiBold" pitchFamily="34" charset="-122"/>
                 <a:cs typeface="Be Vietnam Pro SemiBold" pitchFamily="34" charset="-120"/>
               </a:rPr>
-              <a:t> Không</a:t>
+              <a:t>Không</a:t>
             </a:r>
             <a:r>
               <a:rPr lang="en-US" sz="2850" dirty="0" spc="4" kern="0">
@@ -10719,7 +10725,7 @@
               <a:t> định:</a:t>
             </a:r>
             <a:r>
-              <a:rPr lang="en-US" sz="2850" dirty="0" spc="-3" kern="0">
+              <a:rPr lang="en-US" sz="2850" dirty="0" spc="-2" kern="0">
                 <a:solidFill>
                   <a:srgbClr val="E4E1D8"/>
                 </a:solidFill>
@@ -10727,10 +10733,10 @@
                 <a:ea typeface="Be Vietnam Pro SemiBold" pitchFamily="34" charset="-122"/>
                 <a:cs typeface="Be Vietnam Pro SemiBold" pitchFamily="34" charset="-120"/>
               </a:rPr>
-              <a:t> lỗi,</a:t>
-            </a:r>
-            <a:r>
-              <a:rPr lang="en-US" sz="2850" dirty="0" spc="-18" kern="0">
+              <a:t> lỗi;</a:t>
+            </a:r>
+            <a:r>
+              <a:rPr lang="en-US" sz="2850" dirty="0" spc="-15" kern="0">
                 <a:solidFill>
                   <a:srgbClr val="E4E1D8"/>
                 </a:solidFill>
@@ -10738,10 +10744,10 @@
                 <a:ea typeface="Be Vietnam Pro SemiBold" pitchFamily="34" charset="-122"/>
                 <a:cs typeface="Be Vietnam Pro SemiBold" pitchFamily="34" charset="-120"/>
               </a:rPr>
-              <a:t> và</a:t>
-            </a:r>
-            <a:r>
-              <a:rPr lang="en-US" sz="2850" dirty="0" spc="-15" kern="0">
+              <a:t> PostgreSQL</a:t>
+            </a:r>
+            <a:r>
+              <a:rPr lang="en-US" sz="2850" dirty="0" spc="1" kern="0">
                 <a:solidFill>
                   <a:srgbClr val="E4E1D8"/>
                 </a:solidFill>
@@ -10749,10 +10755,10 @@
                 <a:ea typeface="Be Vietnam Pro SemiBold" pitchFamily="34" charset="-122"/>
                 <a:cs typeface="Be Vietnam Pro SemiBold" pitchFamily="34" charset="-120"/>
               </a:rPr>
-              <a:t> PostgreSQL</a:t>
-            </a:r>
-            <a:r>
-              <a:rPr lang="en-US" sz="2850" dirty="0" spc="2" kern="0">
+              <a:t> từ</a:t>
+            </a:r>
+            <a:r>
+              <a:rPr lang="en-US" sz="2850" dirty="0" spc="-2" kern="0">
                 <a:solidFill>
                   <a:srgbClr val="E4E1D8"/>
                 </a:solidFill>
@@ -10760,10 +10766,10 @@
                 <a:ea typeface="Be Vietnam Pro SemiBold" pitchFamily="34" charset="-122"/>
                 <a:cs typeface="Be Vietnam Pro SemiBold" pitchFamily="34" charset="-120"/>
               </a:rPr>
-              <a:t> từ</a:t>
-            </a:r>
-            <a:r>
-              <a:rPr lang="en-US" sz="2850" dirty="0" spc="-2" kern="0">
+              <a:t> chối</a:t>
+            </a:r>
+            <a:r>
+              <a:rPr lang="en-US" sz="2850" dirty="0" spc="-17" kern="0">
                 <a:solidFill>
                   <a:srgbClr val="E4E1D8"/>
                 </a:solidFill>
@@ -10771,10 +10777,10 @@
                 <a:ea typeface="Be Vietnam Pro SemiBold" pitchFamily="34" charset="-122"/>
                 <a:cs typeface="Be Vietnam Pro SemiBold" pitchFamily="34" charset="-120"/>
               </a:rPr>
-              <a:t> chối</a:t>
-            </a:r>
-            <a:r>
-              <a:rPr lang="en-US" sz="2850" dirty="0" spc="-17" kern="0">
+              <a:t> ngay</a:t>
+            </a:r>
+            <a:r>
+              <a:rPr lang="en-US" sz="2850" dirty="0" spc="-1" kern="0">
                 <a:solidFill>
                   <a:srgbClr val="E4E1D8"/>
                 </a:solidFill>
@@ -10782,10 +10788,10 @@
                 <a:ea typeface="Be Vietnam Pro SemiBold" pitchFamily="34" charset="-122"/>
                 <a:cs typeface="Be Vietnam Pro SemiBold" pitchFamily="34" charset="-120"/>
               </a:rPr>
-              <a:t> ngay</a:t>
-            </a:r>
-            <a:r>
-              <a:rPr lang="en-US" sz="2850" dirty="0" spc="-1" kern="0">
+              <a:t> ở</a:t>
+            </a:r>
+            <a:r>
+              <a:rPr lang="en-US" sz="2850" dirty="0" spc="-13" kern="0">
                 <a:solidFill>
                   <a:srgbClr val="E4E1D8"/>
                 </a:solidFill>
@@ -10793,10 +10799,16 @@
                 <a:ea typeface="Be Vietnam Pro SemiBold" pitchFamily="34" charset="-122"/>
                 <a:cs typeface="Be Vietnam Pro SemiBold" pitchFamily="34" charset="-120"/>
               </a:rPr>
-              <a:t> ở</a:t>
-            </a:r>
-            <a:r>
-              <a:rPr lang="en-US" sz="2850" dirty="0" spc="-13" kern="0">
+              <a:t> migration.</a:t>
+            </a:r>
+            <a:endParaRPr lang="en-US" sz="2850" dirty="0"/>
+          </a:p>
+          <a:p>
+            <a:pPr algn="l" indent="0" marL="0">
+              <a:buNone/>
+            </a:pPr>
+            <a:r>
+              <a:rPr lang="en-US" sz="2850" dirty="0" spc="-4" kern="0">
                 <a:solidFill>
                   <a:srgbClr val="E4E1D8"/>
                 </a:solidFill>
@@ -10804,10 +10816,10 @@
                 <a:ea typeface="Be Vietnam Pro SemiBold" pitchFamily="34" charset="-122"/>
                 <a:cs typeface="Be Vietnam Pro SemiBold" pitchFamily="34" charset="-120"/>
               </a:rPr>
-              <a:t> migration.</a:t>
-            </a:r>
-            <a:r>
-              <a:rPr lang="en-US" sz="2850" dirty="0" spc="0" kern="0">
+              <a:t>An</a:t>
+            </a:r>
+            <a:r>
+              <a:rPr lang="en-US" sz="2850" dirty="0" spc="-8" kern="0">
                 <a:solidFill>
                   <a:srgbClr val="E4E1D8"/>
                 </a:solidFill>
@@ -10815,10 +10827,10 @@
                 <a:ea typeface="Be Vietnam Pro SemiBold" pitchFamily="34" charset="-122"/>
                 <a:cs typeface="Be Vietnam Pro SemiBold" pitchFamily="34" charset="-120"/>
               </a:rPr>
-              <a:t> An</a:t>
-            </a:r>
-            <a:r>
-              <a:rPr lang="en-US" sz="2850" dirty="0" spc="-8" kern="0">
+              <a:t> toàn nhất:</a:t>
+            </a:r>
+            <a:r>
+              <a:rPr lang="en-US" sz="2850" dirty="0" spc="-4" kern="0">
                 <a:solidFill>
                   <a:srgbClr val="E4E1D8"/>
                 </a:solidFill>
@@ -10826,10 +10838,10 @@
                 <a:ea typeface="Be Vietnam Pro SemiBold" pitchFamily="34" charset="-122"/>
                 <a:cs typeface="Be Vietnam Pro SemiBold" pitchFamily="34" charset="-120"/>
               </a:rPr>
-              <a:t> toàn nhất:</a:t>
-            </a:r>
-            <a:r>
-              <a:rPr lang="en-US" sz="2850" dirty="0" spc="-3" kern="0">
+              <a:t> mở</a:t>
+            </a:r>
+            <a:r>
+              <a:rPr lang="en-US" sz="2850" dirty="0" spc="-22" kern="0">
                 <a:solidFill>
                   <a:srgbClr val="E4E1D8"/>
                 </a:solidFill>
@@ -10837,10 +10849,10 @@
                 <a:ea typeface="Be Vietnam Pro SemiBold" pitchFamily="34" charset="-122"/>
                 <a:cs typeface="Be Vietnam Pro SemiBold" pitchFamily="34" charset="-120"/>
               </a:rPr>
-              <a:t> mở</a:t>
-            </a:r>
-            <a:r>
-              <a:rPr lang="en-US" sz="2850" dirty="0" spc="-22" kern="0">
+              <a:t> rộng</a:t>
+            </a:r>
+            <a:r>
+              <a:rPr lang="en-US" sz="2850" dirty="0" spc="-20" kern="0">
                 <a:solidFill>
                   <a:srgbClr val="E4E1D8"/>
                 </a:solidFill>
@@ -10848,10 +10860,10 @@
                 <a:ea typeface="Be Vietnam Pro SemiBold" pitchFamily="34" charset="-122"/>
                 <a:cs typeface="Be Vietnam Pro SemiBold" pitchFamily="34" charset="-120"/>
               </a:rPr>
-              <a:t> rộng</a:t>
-            </a:r>
-            <a:r>
-              <a:rPr lang="en-US" sz="2850" dirty="0" spc="-20" kern="0">
+              <a:t> rồi</a:t>
+            </a:r>
+            <a:r>
+              <a:rPr lang="en-US" sz="2850" dirty="0" spc="2" kern="0">
                 <a:solidFill>
                   <a:srgbClr val="E4E1D8"/>
                 </a:solidFill>
@@ -10859,10 +10871,10 @@
                 <a:ea typeface="Be Vietnam Pro SemiBold" pitchFamily="34" charset="-122"/>
                 <a:cs typeface="Be Vietnam Pro SemiBold" pitchFamily="34" charset="-120"/>
               </a:rPr>
-              <a:t> rồi</a:t>
-            </a:r>
-            <a:r>
-              <a:rPr lang="en-US" sz="2850" dirty="0" spc="2" kern="0">
+              <a:t> thu</a:t>
+            </a:r>
+            <a:r>
+              <a:rPr lang="en-US" sz="2850" dirty="0" spc="-11" kern="0">
                 <a:solidFill>
                   <a:srgbClr val="E4E1D8"/>
                 </a:solidFill>
@@ -10870,17 +10882,6 @@
                 <a:ea typeface="Be Vietnam Pro SemiBold" pitchFamily="34" charset="-122"/>
                 <a:cs typeface="Be Vietnam Pro SemiBold" pitchFamily="34" charset="-120"/>
               </a:rPr>
-              <a:t> thu</a:t>
-            </a:r>
-            <a:r>
-              <a:rPr lang="en-US" sz="2850" dirty="0" spc="-11" kern="0">
-                <a:solidFill>
-                  <a:srgbClr val="E4E1D8"/>
-                </a:solidFill>
-                <a:latin typeface="Be Vietnam Pro SemiBold" pitchFamily="34" charset="0"/>
-                <a:ea typeface="Be Vietnam Pro SemiBold" pitchFamily="34" charset="-122"/>
-                <a:cs typeface="Be Vietnam Pro SemiBold" pitchFamily="34" charset="-120"/>
-              </a:rPr>
               <a:t> gọn.</a:t>
             </a:r>
             <a:endParaRPr lang="en-US" sz="2850" dirty="0"/>
@@ -10895,7 +10896,7 @@
         </p:nvSpPr>
         <p:spPr>
           <a:xfrm>
-            <a:off x="2476500" y="4476750"/>
+            <a:off x="2476500" y="4953000"/>
             <a:ext cx="13335000" cy="0"/>
           </a:xfrm>
           <a:prstGeom prst="line">
@@ -10920,7 +10921,7 @@
         </p:nvSpPr>
         <p:spPr>
           <a:xfrm>
-            <a:off x="1981200" y="3981450"/>
+            <a:off x="1981200" y="4457700"/>
             <a:ext cx="990600" cy="990600"/>
           </a:xfrm>
           <a:prstGeom prst="ellipse">
@@ -10961,7 +10962,7 @@
         </p:nvSpPr>
         <p:spPr>
           <a:xfrm>
-            <a:off x="5314950" y="3981450"/>
+            <a:off x="5314950" y="4457700"/>
             <a:ext cx="990600" cy="990600"/>
           </a:xfrm>
           <a:prstGeom prst="ellipse">
@@ -11002,7 +11003,7 @@
         </p:nvSpPr>
         <p:spPr>
           <a:xfrm>
-            <a:off x="8648700" y="3981450"/>
+            <a:off x="8648700" y="4457700"/>
             <a:ext cx="990600" cy="990600"/>
           </a:xfrm>
           <a:prstGeom prst="ellipse">
@@ -11043,7 +11044,7 @@
         </p:nvSpPr>
         <p:spPr>
           <a:xfrm>
-            <a:off x="11982450" y="3981450"/>
+            <a:off x="11982450" y="4457700"/>
             <a:ext cx="990600" cy="990600"/>
           </a:xfrm>
           <a:prstGeom prst="ellipse">
@@ -11084,7 +11085,7 @@
         </p:nvSpPr>
         <p:spPr>
           <a:xfrm>
-            <a:off x="914400" y="5524500"/>
+            <a:off x="914400" y="6000750"/>
             <a:ext cx="3143250" cy="1905000"/>
           </a:xfrm>
           <a:prstGeom prst="rect">
@@ -11178,7 +11179,7 @@
         </p:nvSpPr>
         <p:spPr>
           <a:xfrm>
-            <a:off x="4248150" y="5524500"/>
+            <a:off x="4248150" y="6000750"/>
             <a:ext cx="3143250" cy="1905000"/>
           </a:xfrm>
           <a:prstGeom prst="rect">
@@ -11283,7 +11284,7 @@
         </p:nvSpPr>
         <p:spPr>
           <a:xfrm>
-            <a:off x="7581900" y="5524500"/>
+            <a:off x="7581900" y="6000750"/>
             <a:ext cx="3143250" cy="1905000"/>
           </a:xfrm>
           <a:prstGeom prst="rect">
@@ -11366,7 +11367,7 @@
         </p:nvSpPr>
         <p:spPr>
           <a:xfrm>
-            <a:off x="10915650" y="5524500"/>
+            <a:off x="10915650" y="6000750"/>
             <a:ext cx="3143250" cy="1905000"/>
           </a:xfrm>
           <a:prstGeom prst="rect">

--- a/system-design-101/vi/lessons/sd-13-020/slides/sd-13-020.pptx
+++ b/system-design-101/vi/lessons/sd-13-020/slides/sd-13-020.pptx
@@ -10582,7 +10582,7 @@
         <p:spPr>
           <a:xfrm>
             <a:off x="914400" y="2047875"/>
-            <a:ext cx="16459200" cy="1619250"/>
+            <a:ext cx="16459200" cy="1809750"/>
           </a:xfrm>
           <a:prstGeom prst="rect">
             <a:avLst/>
@@ -10598,7 +10598,7 @@
               <a:buNone/>
             </a:pPr>
             <a:r>
-              <a:rPr lang="en-US" sz="2850" dirty="0" spc="0" kern="0">
+              <a:rPr lang="en-US" sz="2550" dirty="0" spc="-3" kern="0">
                 <a:solidFill>
                   <a:srgbClr val="E4E1D8"/>
                 </a:solidFill>
@@ -10609,7 +10609,7 @@
               <a:t>Có</a:t>
             </a:r>
             <a:r>
-              <a:rPr lang="en-US" sz="2850" dirty="0" spc="4" kern="0">
+              <a:rPr lang="en-US" sz="2550" dirty="0" spc="-2" kern="0">
                 <a:solidFill>
                   <a:srgbClr val="E4E1D8"/>
                 </a:solidFill>
@@ -10620,7 +10620,7 @@
               <a:t> mặc</a:t>
             </a:r>
             <a:r>
-              <a:rPr lang="en-US" sz="2850" dirty="0" spc="15" kern="0">
+              <a:rPr lang="en-US" sz="2550" dirty="0" spc="16" kern="0">
                 <a:solidFill>
                   <a:srgbClr val="E4E1D8"/>
                 </a:solidFill>
@@ -10631,7 +10631,7 @@
               <a:t> định:</a:t>
             </a:r>
             <a:r>
-              <a:rPr lang="en-US" sz="2850" dirty="0" spc="-1" kern="0">
+              <a:rPr lang="en-US" sz="2550" dirty="0" spc="-3" kern="0">
                 <a:solidFill>
                   <a:srgbClr val="E4E1D8"/>
                 </a:solidFill>
@@ -10642,7 +10642,7 @@
               <a:t> bản</a:t>
             </a:r>
             <a:r>
-              <a:rPr lang="en-US" sz="2850" dirty="0" spc="4" kern="0">
+              <a:rPr lang="en-US" sz="2550" dirty="0" spc="1" kern="0">
                 <a:solidFill>
                   <a:srgbClr val="E4E1D8"/>
                 </a:solidFill>
@@ -10653,7 +10653,7 @@
               <a:t> cũ</a:t>
             </a:r>
             <a:r>
-              <a:rPr lang="en-US" sz="2850" dirty="0" spc="-14" kern="0">
+              <a:rPr lang="en-US" sz="2550" dirty="0" spc="-14" kern="0">
                 <a:solidFill>
                   <a:srgbClr val="E4E1D8"/>
                 </a:solidFill>
@@ -10664,7 +10664,7 @@
               <a:t> vẫn</a:t>
             </a:r>
             <a:r>
-              <a:rPr lang="en-US" sz="2850" dirty="0" spc="1" kern="0">
+              <a:rPr lang="en-US" sz="2550" dirty="0" spc="3" kern="0">
                 <a:solidFill>
                   <a:srgbClr val="E4E1D8"/>
                 </a:solidFill>
@@ -10675,7 +10675,7 @@
               <a:t> ghi</a:t>
             </a:r>
             <a:r>
-              <a:rPr lang="en-US" sz="2850" dirty="0" spc="9" kern="0">
+              <a:rPr lang="en-US" sz="2550" dirty="0" spc="8" kern="0">
                 <a:solidFill>
                   <a:srgbClr val="E4E1D8"/>
                 </a:solidFill>
@@ -10685,14 +10685,14 @@
               </a:rPr>
               <a:t> được.</a:t>
             </a:r>
-            <a:endParaRPr lang="en-US" sz="2850" dirty="0"/>
+            <a:endParaRPr lang="en-US" sz="2550" dirty="0"/>
           </a:p>
           <a:p>
             <a:pPr algn="l" indent="0" marL="0">
               <a:buNone/>
             </a:pPr>
             <a:r>
-              <a:rPr lang="en-US" sz="2850" dirty="0" spc="-9" kern="0">
+              <a:rPr lang="en-US" sz="2550" dirty="0" spc="-3" kern="0">
                 <a:solidFill>
                   <a:srgbClr val="E4E1D8"/>
                 </a:solidFill>
@@ -10703,7 +10703,7 @@
               <a:t>Không</a:t>
             </a:r>
             <a:r>
-              <a:rPr lang="en-US" sz="2850" dirty="0" spc="4" kern="0">
+              <a:rPr lang="en-US" sz="2550" dirty="0" spc="-1" kern="0">
                 <a:solidFill>
                   <a:srgbClr val="E4E1D8"/>
                 </a:solidFill>
@@ -10714,7 +10714,7 @@
               <a:t> mặc</a:t>
             </a:r>
             <a:r>
-              <a:rPr lang="en-US" sz="2850" dirty="0" spc="15" kern="0">
+              <a:rPr lang="en-US" sz="2550" dirty="0" spc="14" kern="0">
                 <a:solidFill>
                   <a:srgbClr val="E4E1D8"/>
                 </a:solidFill>
@@ -10722,10 +10722,10 @@
                 <a:ea typeface="Be Vietnam Pro SemiBold" pitchFamily="34" charset="-122"/>
                 <a:cs typeface="Be Vietnam Pro SemiBold" pitchFamily="34" charset="-120"/>
               </a:rPr>
-              <a:t> định:</a:t>
-            </a:r>
-            <a:r>
-              <a:rPr lang="en-US" sz="2850" dirty="0" spc="-2" kern="0">
+              <a:t> định,</a:t>
+            </a:r>
+            <a:r>
+              <a:rPr lang="en-US" sz="2550" dirty="0" spc="-2" kern="0">
                 <a:solidFill>
                   <a:srgbClr val="E4E1D8"/>
                 </a:solidFill>
@@ -10733,10 +10733,10 @@
                 <a:ea typeface="Be Vietnam Pro SemiBold" pitchFamily="34" charset="-122"/>
                 <a:cs typeface="Be Vietnam Pro SemiBold" pitchFamily="34" charset="-120"/>
               </a:rPr>
-              <a:t> lỗi;</a:t>
-            </a:r>
-            <a:r>
-              <a:rPr lang="en-US" sz="2850" dirty="0" spc="-15" kern="0">
+              <a:t> bảng</a:t>
+            </a:r>
+            <a:r>
+              <a:rPr lang="en-US" sz="2550" dirty="0" spc="9" kern="0">
                 <a:solidFill>
                   <a:srgbClr val="E4E1D8"/>
                 </a:solidFill>
@@ -10744,10 +10744,10 @@
                 <a:ea typeface="Be Vietnam Pro SemiBold" pitchFamily="34" charset="-122"/>
                 <a:cs typeface="Be Vietnam Pro SemiBold" pitchFamily="34" charset="-120"/>
               </a:rPr>
-              <a:t> PostgreSQL</a:t>
-            </a:r>
-            <a:r>
-              <a:rPr lang="en-US" sz="2850" dirty="0" spc="1" kern="0">
+              <a:t> đã</a:t>
+            </a:r>
+            <a:r>
+              <a:rPr lang="en-US" sz="2550" dirty="0" spc="-4" kern="0">
                 <a:solidFill>
                   <a:srgbClr val="E4E1D8"/>
                 </a:solidFill>
@@ -10755,10 +10755,10 @@
                 <a:ea typeface="Be Vietnam Pro SemiBold" pitchFamily="34" charset="-122"/>
                 <a:cs typeface="Be Vietnam Pro SemiBold" pitchFamily="34" charset="-120"/>
               </a:rPr>
-              <a:t> từ</a:t>
-            </a:r>
-            <a:r>
-              <a:rPr lang="en-US" sz="2850" dirty="0" spc="-2" kern="0">
+              <a:t> có dòng:</a:t>
+            </a:r>
+            <a:r>
+              <a:rPr lang="en-US" sz="2550" dirty="0" spc="-11" kern="0">
                 <a:solidFill>
                   <a:srgbClr val="E4E1D8"/>
                 </a:solidFill>
@@ -10766,10 +10766,10 @@
                 <a:ea typeface="Be Vietnam Pro SemiBold" pitchFamily="34" charset="-122"/>
                 <a:cs typeface="Be Vietnam Pro SemiBold" pitchFamily="34" charset="-120"/>
               </a:rPr>
-              <a:t> chối</a:t>
-            </a:r>
-            <a:r>
-              <a:rPr lang="en-US" sz="2850" dirty="0" spc="-17" kern="0">
+              <a:t> migration</a:t>
+            </a:r>
+            <a:r>
+              <a:rPr lang="en-US" sz="2550" dirty="0" spc="0" kern="0">
                 <a:solidFill>
                   <a:srgbClr val="E4E1D8"/>
                 </a:solidFill>
@@ -10777,10 +10777,10 @@
                 <a:ea typeface="Be Vietnam Pro SemiBold" pitchFamily="34" charset="-122"/>
                 <a:cs typeface="Be Vietnam Pro SemiBold" pitchFamily="34" charset="-120"/>
               </a:rPr>
-              <a:t> ngay</a:t>
-            </a:r>
-            <a:r>
-              <a:rPr lang="en-US" sz="2850" dirty="0" spc="-1" kern="0">
+              <a:t> bị</a:t>
+            </a:r>
+            <a:r>
+              <a:rPr lang="en-US" sz="2550" dirty="0" spc="-2" kern="0">
                 <a:solidFill>
                   <a:srgbClr val="E4E1D8"/>
                 </a:solidFill>
@@ -10788,10 +10788,10 @@
                 <a:ea typeface="Be Vietnam Pro SemiBold" pitchFamily="34" charset="-122"/>
                 <a:cs typeface="Be Vietnam Pro SemiBold" pitchFamily="34" charset="-120"/>
               </a:rPr>
-              <a:t> ở</a:t>
-            </a:r>
-            <a:r>
-              <a:rPr lang="en-US" sz="2850" dirty="0" spc="-13" kern="0">
+              <a:t> từ</a:t>
+            </a:r>
+            <a:r>
+              <a:rPr lang="en-US" sz="2550" dirty="0" spc="-1" kern="0">
                 <a:solidFill>
                   <a:srgbClr val="E4E1D8"/>
                 </a:solidFill>
@@ -10799,16 +10799,16 @@
                 <a:ea typeface="Be Vietnam Pro SemiBold" pitchFamily="34" charset="-122"/>
                 <a:cs typeface="Be Vietnam Pro SemiBold" pitchFamily="34" charset="-120"/>
               </a:rPr>
-              <a:t> migration.</a:t>
-            </a:r>
-            <a:endParaRPr lang="en-US" sz="2850" dirty="0"/>
+              <a:t> chối.</a:t>
+            </a:r>
+            <a:endParaRPr lang="en-US" sz="2550" dirty="0"/>
           </a:p>
           <a:p>
             <a:pPr algn="l" indent="0" marL="0">
               <a:buNone/>
             </a:pPr>
             <a:r>
-              <a:rPr lang="en-US" sz="2850" dirty="0" spc="-4" kern="0">
+              <a:rPr lang="en-US" sz="2550" dirty="0" spc="-3" kern="0">
                 <a:solidFill>
                   <a:srgbClr val="E4E1D8"/>
                 </a:solidFill>
@@ -10816,10 +10816,10 @@
                 <a:ea typeface="Be Vietnam Pro SemiBold" pitchFamily="34" charset="-122"/>
                 <a:cs typeface="Be Vietnam Pro SemiBold" pitchFamily="34" charset="-120"/>
               </a:rPr>
-              <a:t>An</a:t>
-            </a:r>
-            <a:r>
-              <a:rPr lang="en-US" sz="2850" dirty="0" spc="-8" kern="0">
+              <a:t>Không</a:t>
+            </a:r>
+            <a:r>
+              <a:rPr lang="en-US" sz="2550" dirty="0" spc="-1" kern="0">
                 <a:solidFill>
                   <a:srgbClr val="E4E1D8"/>
                 </a:solidFill>
@@ -10827,10 +10827,10 @@
                 <a:ea typeface="Be Vietnam Pro SemiBold" pitchFamily="34" charset="-122"/>
                 <a:cs typeface="Be Vietnam Pro SemiBold" pitchFamily="34" charset="-120"/>
               </a:rPr>
-              <a:t> toàn nhất:</a:t>
-            </a:r>
-            <a:r>
-              <a:rPr lang="en-US" sz="2850" dirty="0" spc="-4" kern="0">
+              <a:t> mặc</a:t>
+            </a:r>
+            <a:r>
+              <a:rPr lang="en-US" sz="2550" dirty="0" spc="14" kern="0">
                 <a:solidFill>
                   <a:srgbClr val="E4E1D8"/>
                 </a:solidFill>
@@ -10838,10 +10838,10 @@
                 <a:ea typeface="Be Vietnam Pro SemiBold" pitchFamily="34" charset="-122"/>
                 <a:cs typeface="Be Vietnam Pro SemiBold" pitchFamily="34" charset="-120"/>
               </a:rPr>
-              <a:t> mở</a:t>
-            </a:r>
-            <a:r>
-              <a:rPr lang="en-US" sz="2850" dirty="0" spc="-22" kern="0">
+              <a:t> định,</a:t>
+            </a:r>
+            <a:r>
+              <a:rPr lang="en-US" sz="2550" dirty="0" spc="-2" kern="0">
                 <a:solidFill>
                   <a:srgbClr val="E4E1D8"/>
                 </a:solidFill>
@@ -10849,10 +10849,10 @@
                 <a:ea typeface="Be Vietnam Pro SemiBold" pitchFamily="34" charset="-122"/>
                 <a:cs typeface="Be Vietnam Pro SemiBold" pitchFamily="34" charset="-120"/>
               </a:rPr>
-              <a:t> rộng</a:t>
-            </a:r>
-            <a:r>
-              <a:rPr lang="en-US" sz="2850" dirty="0" spc="-20" kern="0">
+              <a:t> bảng</a:t>
+            </a:r>
+            <a:r>
+              <a:rPr lang="en-US" sz="2550" dirty="0" spc="-14" kern="0">
                 <a:solidFill>
                   <a:srgbClr val="E4E1D8"/>
                 </a:solidFill>
@@ -10860,10 +10860,10 @@
                 <a:ea typeface="Be Vietnam Pro SemiBold" pitchFamily="34" charset="-122"/>
                 <a:cs typeface="Be Vietnam Pro SemiBold" pitchFamily="34" charset="-120"/>
               </a:rPr>
-              <a:t> rồi</a:t>
-            </a:r>
-            <a:r>
-              <a:rPr lang="en-US" sz="2850" dirty="0" spc="2" kern="0">
+              <a:t> rỗng:</a:t>
+            </a:r>
+            <a:r>
+              <a:rPr lang="en-US" sz="2550" dirty="0" spc="-3" kern="0">
                 <a:solidFill>
                   <a:srgbClr val="E4E1D8"/>
                 </a:solidFill>
@@ -10871,10 +10871,10 @@
                 <a:ea typeface="Be Vietnam Pro SemiBold" pitchFamily="34" charset="-122"/>
                 <a:cs typeface="Be Vietnam Pro SemiBold" pitchFamily="34" charset="-120"/>
               </a:rPr>
-              <a:t> thu</a:t>
-            </a:r>
-            <a:r>
-              <a:rPr lang="en-US" sz="2850" dirty="0" spc="-11" kern="0">
+              <a:t> bản</a:t>
+            </a:r>
+            <a:r>
+              <a:rPr lang="en-US" sz="2550" dirty="0" spc="1" kern="0">
                 <a:solidFill>
                   <a:srgbClr val="E4E1D8"/>
                 </a:solidFill>
@@ -10882,9 +10882,125 @@
                 <a:ea typeface="Be Vietnam Pro SemiBold" pitchFamily="34" charset="-122"/>
                 <a:cs typeface="Be Vietnam Pro SemiBold" pitchFamily="34" charset="-120"/>
               </a:rPr>
+              <a:t> cũ</a:t>
+            </a:r>
+            <a:r>
+              <a:rPr lang="en-US" sz="2550" dirty="0" spc="3" kern="0">
+                <a:solidFill>
+                  <a:srgbClr val="E4E1D8"/>
+                </a:solidFill>
+                <a:latin typeface="Be Vietnam Pro SemiBold" pitchFamily="34" charset="0"/>
+                <a:ea typeface="Be Vietnam Pro SemiBold" pitchFamily="34" charset="-122"/>
+                <a:cs typeface="Be Vietnam Pro SemiBold" pitchFamily="34" charset="-120"/>
+              </a:rPr>
+              <a:t> ghi</a:t>
+            </a:r>
+            <a:r>
+              <a:rPr lang="en-US" sz="2550" dirty="0" spc="-4" kern="0">
+                <a:solidFill>
+                  <a:srgbClr val="E4E1D8"/>
+                </a:solidFill>
+                <a:latin typeface="Be Vietnam Pro SemiBold" pitchFamily="34" charset="0"/>
+                <a:ea typeface="Be Vietnam Pro SemiBold" pitchFamily="34" charset="-122"/>
+                <a:cs typeface="Be Vietnam Pro SemiBold" pitchFamily="34" charset="-120"/>
+              </a:rPr>
+              <a:t> lỗi sau.</a:t>
+            </a:r>
+            <a:endParaRPr lang="en-US" sz="2550" dirty="0"/>
+          </a:p>
+          <a:p>
+            <a:pPr algn="l" indent="0" marL="0">
+              <a:buNone/>
+            </a:pPr>
+            <a:r>
+              <a:rPr lang="en-US" sz="2550" dirty="0" spc="0" kern="0">
+                <a:solidFill>
+                  <a:srgbClr val="E4E1D8"/>
+                </a:solidFill>
+                <a:latin typeface="Be Vietnam Pro SemiBold" pitchFamily="34" charset="0"/>
+                <a:ea typeface="Be Vietnam Pro SemiBold" pitchFamily="34" charset="-122"/>
+                <a:cs typeface="Be Vietnam Pro SemiBold" pitchFamily="34" charset="-120"/>
+              </a:rPr>
+              <a:t>An</a:t>
+            </a:r>
+            <a:r>
+              <a:rPr lang="en-US" sz="2550" dirty="0" spc="-9" kern="0">
+                <a:solidFill>
+                  <a:srgbClr val="E4E1D8"/>
+                </a:solidFill>
+                <a:latin typeface="Be Vietnam Pro SemiBold" pitchFamily="34" charset="0"/>
+                <a:ea typeface="Be Vietnam Pro SemiBold" pitchFamily="34" charset="-122"/>
+                <a:cs typeface="Be Vietnam Pro SemiBold" pitchFamily="34" charset="-120"/>
+              </a:rPr>
+              <a:t> toàn</a:t>
+            </a:r>
+            <a:r>
+              <a:rPr lang="en-US" sz="2550" dirty="0" spc="-7" kern="0">
+                <a:solidFill>
+                  <a:srgbClr val="E4E1D8"/>
+                </a:solidFill>
+                <a:latin typeface="Be Vietnam Pro SemiBold" pitchFamily="34" charset="0"/>
+                <a:ea typeface="Be Vietnam Pro SemiBold" pitchFamily="34" charset="-122"/>
+                <a:cs typeface="Be Vietnam Pro SemiBold" pitchFamily="34" charset="-120"/>
+              </a:rPr>
+              <a:t> nhất:</a:t>
+            </a:r>
+            <a:r>
+              <a:rPr lang="en-US" sz="2550" dirty="0" spc="-6" kern="0">
+                <a:solidFill>
+                  <a:srgbClr val="E4E1D8"/>
+                </a:solidFill>
+                <a:latin typeface="Be Vietnam Pro SemiBold" pitchFamily="34" charset="0"/>
+                <a:ea typeface="Be Vietnam Pro SemiBold" pitchFamily="34" charset="-122"/>
+                <a:cs typeface="Be Vietnam Pro SemiBold" pitchFamily="34" charset="-120"/>
+              </a:rPr>
+              <a:t> mở</a:t>
+            </a:r>
+            <a:r>
+              <a:rPr lang="en-US" sz="2550" dirty="0" spc="-17" kern="0">
+                <a:solidFill>
+                  <a:srgbClr val="E4E1D8"/>
+                </a:solidFill>
+                <a:latin typeface="Be Vietnam Pro SemiBold" pitchFamily="34" charset="0"/>
+                <a:ea typeface="Be Vietnam Pro SemiBold" pitchFamily="34" charset="-122"/>
+                <a:cs typeface="Be Vietnam Pro SemiBold" pitchFamily="34" charset="-120"/>
+              </a:rPr>
+              <a:t> rộng</a:t>
+            </a:r>
+            <a:r>
+              <a:rPr lang="en-US" sz="2550" dirty="0" spc="-19" kern="0">
+                <a:solidFill>
+                  <a:srgbClr val="E4E1D8"/>
+                </a:solidFill>
+                <a:latin typeface="Be Vietnam Pro SemiBold" pitchFamily="34" charset="0"/>
+                <a:ea typeface="Be Vietnam Pro SemiBold" pitchFamily="34" charset="-122"/>
+                <a:cs typeface="Be Vietnam Pro SemiBold" pitchFamily="34" charset="-120"/>
+              </a:rPr>
+              <a:t> rồi</a:t>
+            </a:r>
+            <a:r>
+              <a:rPr lang="en-US" sz="2550" dirty="0" spc="-2" kern="0">
+                <a:solidFill>
+                  <a:srgbClr val="E4E1D8"/>
+                </a:solidFill>
+                <a:latin typeface="Be Vietnam Pro SemiBold" pitchFamily="34" charset="0"/>
+                <a:ea typeface="Be Vietnam Pro SemiBold" pitchFamily="34" charset="-122"/>
+                <a:cs typeface="Be Vietnam Pro SemiBold" pitchFamily="34" charset="-120"/>
+              </a:rPr>
+              <a:t> thu</a:t>
+            </a:r>
+            <a:r>
+              <a:rPr lang="en-US" sz="2550" dirty="0" spc="-7" kern="0">
+                <a:solidFill>
+                  <a:srgbClr val="E4E1D8"/>
+                </a:solidFill>
+                <a:latin typeface="Be Vietnam Pro SemiBold" pitchFamily="34" charset="0"/>
+                <a:ea typeface="Be Vietnam Pro SemiBold" pitchFamily="34" charset="-122"/>
+                <a:cs typeface="Be Vietnam Pro SemiBold" pitchFamily="34" charset="-120"/>
+              </a:rPr>
               <a:t> gọn.</a:t>
             </a:r>
-            <a:endParaRPr lang="en-US" sz="2850" dirty="0"/>
+            <a:endParaRPr lang="en-US" sz="2550" dirty="0"/>
           </a:p>
         </p:txBody>
       </p:sp>

--- a/system-design-101/vi/lessons/sd-13-020/slides/sd-13-020.pptx
+++ b/system-design-101/vi/lessons/sd-13-020/slides/sd-13-020.pptx
@@ -5272,7 +5272,7 @@
               <a:buNone/>
             </a:pPr>
             <a:r>
-              <a:rPr lang="en-US" sz="6300" dirty="0" spc="-148" kern="0">
+              <a:rPr lang="en-US" sz="6900" dirty="0" spc="-162" kern="0">
                 <a:solidFill>
                   <a:srgbClr val="14161C"/>
                 </a:solidFill>
@@ -5283,7 +5283,7 @@
               <a:t>Tải</a:t>
             </a:r>
             <a:r>
-              <a:rPr lang="en-US" sz="6300" dirty="0" spc="14" kern="0">
+              <a:rPr lang="en-US" sz="6900" dirty="0" spc="12" kern="0">
                 <a:solidFill>
                   <a:srgbClr val="14161C"/>
                 </a:solidFill>
@@ -5294,7 +5294,7 @@
               <a:t> thật,</a:t>
             </a:r>
             <a:r>
-              <a:rPr lang="en-US" sz="6300" dirty="0" spc="3" kern="0">
+              <a:rPr lang="en-US" sz="6900" dirty="0" spc="3" kern="0">
                 <a:solidFill>
                   <a:srgbClr val="14161C"/>
                 </a:solidFill>
@@ -5305,7 +5305,7 @@
               <a:t> hai</a:t>
             </a:r>
             <a:r>
-              <a:rPr lang="en-US" sz="6300" dirty="0" spc="5" kern="0">
+              <a:rPr lang="en-US" sz="6900" dirty="0" spc="6" kern="0">
                 <a:solidFill>
                   <a:srgbClr val="14161C"/>
                 </a:solidFill>
@@ -5316,7 +5316,7 @@
               <a:t> phiên</a:t>
             </a:r>
             <a:r>
-              <a:rPr lang="en-US" sz="6300" dirty="0" spc="-1" kern="0">
+              <a:rPr lang="en-US" sz="6900" dirty="0" spc="-3" kern="0">
                 <a:solidFill>
                   <a:srgbClr val="14161C"/>
                 </a:solidFill>
@@ -5327,7 +5327,7 @@
               <a:t> bản</a:t>
             </a:r>
             <a:r>
-              <a:rPr lang="en-US" sz="6300" dirty="0" spc="-14" kern="0">
+              <a:rPr lang="en-US" sz="6900" dirty="0" spc="-17" kern="0">
                 <a:solidFill>
                   <a:srgbClr val="14161C"/>
                 </a:solidFill>
@@ -5338,7 +5338,7 @@
               <a:t> gặp</a:t>
             </a:r>
             <a:r>
-              <a:rPr lang="en-US" sz="6300" dirty="0" spc="2" kern="0">
+              <a:rPr lang="en-US" sz="6900" dirty="0" spc="4" kern="0">
                 <a:solidFill>
                   <a:srgbClr val="14161C"/>
                 </a:solidFill>
@@ -5348,7 +5348,7 @@
               </a:rPr>
               <a:t> nhau</a:t>
             </a:r>
-            <a:endParaRPr lang="en-US" sz="6300" dirty="0"/>
+            <a:endParaRPr lang="en-US" sz="6900" dirty="0"/>
           </a:p>
         </p:txBody>
       </p:sp>
@@ -6511,7 +6511,7 @@
               <a:buNone/>
             </a:pPr>
             <a:r>
-              <a:rPr lang="en-US" sz="6600" dirty="0" spc="-1" kern="0">
+              <a:rPr lang="en-US" sz="6900" dirty="0" spc="1" kern="0">
                 <a:solidFill>
                   <a:srgbClr val="F3EEE3"/>
                 </a:solidFill>
@@ -6519,10 +6519,10 @@
                 <a:ea typeface="Bricolage Grotesque ExtraBold" pitchFamily="34" charset="-122"/>
                 <a:cs typeface="Bricolage Grotesque ExtraBold" pitchFamily="34" charset="-120"/>
               </a:rPr>
-              <a:t>Không biết</a:t>
-            </a:r>
-            <a:r>
-              <a:rPr lang="en-US" sz="6600" dirty="0" spc="-4" kern="0">
+              <a:t>Không</a:t>
+            </a:r>
+            <a:r>
+              <a:rPr lang="en-US" sz="6900" dirty="0" spc="2" kern="0">
                 <a:solidFill>
                   <a:srgbClr val="F3EEE3"/>
                 </a:solidFill>
@@ -6530,10 +6530,10 @@
                 <a:ea typeface="Bricolage Grotesque ExtraBold" pitchFamily="34" charset="-122"/>
                 <a:cs typeface="Bricolage Grotesque ExtraBold" pitchFamily="34" charset="-120"/>
               </a:rPr>
-              <a:t> bản</a:t>
-            </a:r>
-            <a:r>
-              <a:rPr lang="en-US" sz="6600" dirty="0" spc="-31" kern="0">
+              <a:t> biết</a:t>
+            </a:r>
+            <a:r>
+              <a:rPr lang="en-US" sz="6900" dirty="0" spc="-4" kern="0">
                 <a:solidFill>
                   <a:srgbClr val="F3EEE3"/>
                 </a:solidFill>
@@ -6541,10 +6541,10 @@
                 <a:ea typeface="Bricolage Grotesque ExtraBold" pitchFamily="34" charset="-122"/>
                 <a:cs typeface="Bricolage Grotesque ExtraBold" pitchFamily="34" charset="-120"/>
               </a:rPr>
-              <a:t> mới</a:t>
-            </a:r>
-            <a:r>
-              <a:rPr lang="en-US" sz="6600" dirty="0" spc="-33" kern="0">
+              <a:t> bản</a:t>
+            </a:r>
+            <a:r>
+              <a:rPr lang="en-US" sz="6900" dirty="0" spc="-33" kern="0">
                 <a:solidFill>
                   <a:srgbClr val="F3EEE3"/>
                 </a:solidFill>
@@ -6552,10 +6552,10 @@
                 <a:ea typeface="Bricolage Grotesque ExtraBold" pitchFamily="34" charset="-122"/>
                 <a:cs typeface="Bricolage Grotesque ExtraBold" pitchFamily="34" charset="-120"/>
               </a:rPr>
-              <a:t> tốt</a:t>
-            </a:r>
-            <a:r>
-              <a:rPr lang="en-US" sz="6600" dirty="0" spc="0" kern="0">
+              <a:t> mới</a:t>
+            </a:r>
+            <a:r>
+              <a:rPr lang="en-US" sz="6900" dirty="0" spc="-37" kern="0">
                 <a:solidFill>
                   <a:srgbClr val="F3EEE3"/>
                 </a:solidFill>
@@ -6563,10 +6563,10 @@
                 <a:ea typeface="Bricolage Grotesque ExtraBold" pitchFamily="34" charset="-122"/>
                 <a:cs typeface="Bricolage Grotesque ExtraBold" pitchFamily="34" charset="-120"/>
               </a:rPr>
-              <a:t> hay</a:t>
-            </a:r>
-            <a:r>
-              <a:rPr lang="en-US" sz="6600" dirty="0" spc="-33" kern="0">
+              <a:t> tốt</a:t>
+            </a:r>
+            <a:r>
+              <a:rPr lang="en-US" sz="6900" dirty="0" spc="0" kern="0">
                 <a:solidFill>
                   <a:srgbClr val="F3EEE3"/>
                 </a:solidFill>
@@ -6574,9 +6574,20 @@
                 <a:ea typeface="Bricolage Grotesque ExtraBold" pitchFamily="34" charset="-122"/>
                 <a:cs typeface="Bricolage Grotesque ExtraBold" pitchFamily="34" charset="-120"/>
               </a:rPr>
+              <a:t> hay</a:t>
+            </a:r>
+            <a:r>
+              <a:rPr lang="en-US" sz="6900" dirty="0" spc="-32" kern="0">
+                <a:solidFill>
+                  <a:srgbClr val="F3EEE3"/>
+                </a:solidFill>
+                <a:latin typeface="Bricolage Grotesque ExtraBold" pitchFamily="34" charset="0"/>
+                <a:ea typeface="Bricolage Grotesque ExtraBold" pitchFamily="34" charset="-122"/>
+                <a:cs typeface="Bricolage Grotesque ExtraBold" pitchFamily="34" charset="-120"/>
+              </a:rPr>
               <a:t> xấu</a:t>
             </a:r>
-            <a:endParaRPr lang="en-US" sz="6600" dirty="0"/>
+            <a:endParaRPr lang="en-US" sz="6900" dirty="0"/>
           </a:p>
         </p:txBody>
       </p:sp>
@@ -10455,7 +10466,7 @@
         <p:spPr>
           <a:xfrm>
             <a:off x="914400" y="1238250"/>
-            <a:ext cx="16459200" cy="952500"/>
+            <a:ext cx="16459200" cy="1143000"/>
           </a:xfrm>
           <a:prstGeom prst="rect">
             <a:avLst/>
@@ -10464,14 +10475,14 @@
           <a:ln/>
         </p:spPr>
         <p:txBody>
-          <a:bodyPr wrap="square" lIns="0" tIns="0" rIns="0" bIns="0" rtlCol="0" anchor="ctr"/>
+          <a:bodyPr wrap="square" lIns="0" tIns="0" rIns="0" bIns="0" rtlCol="0" anchor="t"/>
           <a:lstStyle/>
           <a:p>
             <a:pPr algn="l" indent="0" marL="0">
               <a:buNone/>
             </a:pPr>
             <a:r>
-              <a:rPr lang="en-US" sz="4350" dirty="0" spc="0" kern="0">
+              <a:rPr lang="en-US" sz="6900" dirty="0" spc="4" kern="0">
                 <a:solidFill>
                   <a:srgbClr val="F3EEE3"/>
                 </a:solidFill>
@@ -10482,7 +10493,7 @@
               <a:t>Thêm</a:t>
             </a:r>
             <a:r>
-              <a:rPr lang="en-US" sz="4350" dirty="0" spc="-8" kern="0">
+              <a:rPr lang="en-US" sz="6900" dirty="0" spc="-11" kern="0">
                 <a:solidFill>
                   <a:srgbClr val="F3EEE3"/>
                 </a:solidFill>
@@ -10493,7 +10504,7 @@
               <a:t> cột</a:t>
             </a:r>
             <a:r>
-              <a:rPr lang="en-US" sz="4350" dirty="0" spc="-2" kern="0">
+              <a:rPr lang="en-US" sz="6900" dirty="0" spc="-4" kern="0">
                 <a:solidFill>
                   <a:srgbClr val="F3EEE3"/>
                 </a:solidFill>
@@ -10504,7 +10515,7 @@
               <a:t> bắt</a:t>
             </a:r>
             <a:r>
-              <a:rPr lang="en-US" sz="4350" dirty="0" spc="4" kern="0">
+              <a:rPr lang="en-US" sz="6900" dirty="0" spc="5" kern="0">
                 <a:solidFill>
                   <a:srgbClr val="F3EEE3"/>
                 </a:solidFill>
@@ -10512,10 +10523,10 @@
                 <a:ea typeface="Bricolage Grotesque ExtraBold" pitchFamily="34" charset="-122"/>
                 <a:cs typeface="Bricolage Grotesque ExtraBold" pitchFamily="34" charset="-120"/>
               </a:rPr>
-              <a:t> buộc</a:t>
-            </a:r>
-            <a:r>
-              <a:rPr lang="en-US" sz="4350" dirty="0" spc="0" kern="0">
+              <a:t> buộc,</a:t>
+            </a:r>
+            <a:r>
+              <a:rPr lang="en-US" sz="6900" dirty="0" spc="-4" kern="0">
                 <a:solidFill>
                   <a:srgbClr val="F3EEE3"/>
                 </a:solidFill>
@@ -10523,10 +10534,10 @@
                 <a:ea typeface="Bricolage Grotesque ExtraBold" pitchFamily="34" charset="-122"/>
                 <a:cs typeface="Bricolage Grotesque ExtraBold" pitchFamily="34" charset="-120"/>
               </a:rPr>
-              <a:t> khi</a:t>
-            </a:r>
-            <a:r>
-              <a:rPr lang="en-US" sz="4350" dirty="0" spc="-3" kern="0">
+              <a:t> bản</a:t>
+            </a:r>
+            <a:r>
+              <a:rPr lang="en-US" sz="6900" dirty="0" spc="0" kern="0">
                 <a:solidFill>
                   <a:srgbClr val="F3EEE3"/>
                 </a:solidFill>
@@ -10534,10 +10545,10 @@
                 <a:ea typeface="Bricolage Grotesque ExtraBold" pitchFamily="34" charset="-122"/>
                 <a:cs typeface="Bricolage Grotesque ExtraBold" pitchFamily="34" charset="-120"/>
               </a:rPr>
-              <a:t> bản</a:t>
-            </a:r>
-            <a:r>
-              <a:rPr lang="en-US" sz="4350" dirty="0" spc="-4" kern="0">
+              <a:t> cũ</a:t>
+            </a:r>
+            <a:r>
+              <a:rPr lang="en-US" sz="6900" dirty="0" spc="-56" kern="0">
                 <a:solidFill>
                   <a:srgbClr val="F3EEE3"/>
                 </a:solidFill>
@@ -10545,10 +10556,10 @@
                 <a:ea typeface="Bricolage Grotesque ExtraBold" pitchFamily="34" charset="-122"/>
                 <a:cs typeface="Bricolage Grotesque ExtraBold" pitchFamily="34" charset="-120"/>
               </a:rPr>
-              <a:t> cũ</a:t>
-            </a:r>
-            <a:r>
-              <a:rPr lang="en-US" sz="4350" dirty="0" spc="-36" kern="0">
+              <a:t> vẫn</a:t>
+            </a:r>
+            <a:r>
+              <a:rPr lang="en-US" sz="6900" dirty="0" spc="-2" kern="0">
                 <a:solidFill>
                   <a:srgbClr val="F3EEE3"/>
                 </a:solidFill>
@@ -10556,20 +10567,9 @@
                 <a:ea typeface="Bricolage Grotesque ExtraBold" pitchFamily="34" charset="-122"/>
                 <a:cs typeface="Bricolage Grotesque ExtraBold" pitchFamily="34" charset="-120"/>
               </a:rPr>
-              <a:t> vẫn</a:t>
-            </a:r>
-            <a:r>
-              <a:rPr lang="en-US" sz="4350" dirty="0" spc="-3" kern="0">
-                <a:solidFill>
-                  <a:srgbClr val="F3EEE3"/>
-                </a:solidFill>
-                <a:latin typeface="Bricolage Grotesque ExtraBold" pitchFamily="34" charset="0"/>
-                <a:ea typeface="Bricolage Grotesque ExtraBold" pitchFamily="34" charset="-122"/>
-                <a:cs typeface="Bricolage Grotesque ExtraBold" pitchFamily="34" charset="-120"/>
-              </a:rPr>
               <a:t> chạy?</a:t>
             </a:r>
-            <a:endParaRPr lang="en-US" sz="4350" dirty="0"/>
+            <a:endParaRPr lang="en-US" sz="6900" dirty="0"/>
           </a:p>
         </p:txBody>
       </p:sp>
@@ -10581,7 +10581,7 @@
         </p:nvSpPr>
         <p:spPr>
           <a:xfrm>
-            <a:off x="914400" y="2047875"/>
+            <a:off x="914400" y="2333625"/>
             <a:ext cx="16459200" cy="1809750"/>
           </a:xfrm>
           <a:prstGeom prst="rect">

--- a/system-design-101/vi/lessons/sd-13-020/slides/sd-13-020.pptx
+++ b/system-design-101/vi/lessons/sd-13-020/slides/sd-13-020.pptx
@@ -9507,17 +9507,6 @@
               <a:t> thay</a:t>
             </a:r>
             <a:r>
-              <a:rPr lang="en-US" sz="2850" dirty="0" spc="12" kern="0">
-                <a:solidFill>
-                  <a:srgbClr val="14161C"/>
-                </a:solidFill>
-                <a:latin typeface="Be Vietnam Pro SemiBold" pitchFamily="34" charset="0"/>
-                <a:ea typeface="Be Vietnam Pro SemiBold" pitchFamily="34" charset="-122"/>
-                <a:cs typeface="Be Vietnam Pro SemiBold" pitchFamily="34" charset="-120"/>
-              </a:rPr>
-              <a:t> được</a:t>
-            </a:r>
-            <a:r>
               <a:rPr lang="en-US" sz="2850" dirty="0" spc="-1" kern="0">
                 <a:solidFill>
                   <a:srgbClr val="14161C"/>
@@ -9736,7 +9725,7 @@
                 <a:ea typeface="Be Vietnam Pro SemiBold" pitchFamily="34" charset="-122"/>
                 <a:cs typeface="Be Vietnam Pro SemiBold" pitchFamily="34" charset="-120"/>
               </a:rPr>
-              <a:t> bản</a:t>
+              <a:t> sẵn bản</a:t>
             </a:r>
             <a:r>
               <a:rPr lang="en-US" sz="2850" dirty="0" spc="9" kern="0">
@@ -9750,7 +9739,7 @@
               <a:t> trước</a:t>
             </a:r>
             <a:r>
-              <a:rPr lang="en-US" sz="2850" dirty="0" spc="-1" kern="0">
+              <a:rPr lang="en-US" sz="2850" dirty="0" spc="1" kern="0">
                 <a:solidFill>
                   <a:srgbClr val="14161C"/>
                 </a:solidFill>
@@ -9758,10 +9747,10 @@
                 <a:ea typeface="Be Vietnam Pro SemiBold" pitchFamily="34" charset="-122"/>
                 <a:cs typeface="Be Vietnam Pro SemiBold" pitchFamily="34" charset="-120"/>
               </a:rPr>
-              <a:t> sẵn</a:t>
-            </a:r>
-            <a:r>
-              <a:rPr lang="en-US" sz="2850" dirty="0" spc="-3" kern="0">
+              <a:t> cần</a:t>
+            </a:r>
+            <a:r>
+              <a:rPr lang="en-US" sz="2850" dirty="0" spc="-4" kern="0">
                 <a:solidFill>
                   <a:srgbClr val="14161C"/>
                 </a:solidFill>
@@ -9769,10 +9758,10 @@
                 <a:ea typeface="Be Vietnam Pro SemiBold" pitchFamily="34" charset="-122"/>
                 <a:cs typeface="Be Vietnam Pro SemiBold" pitchFamily="34" charset="-120"/>
               </a:rPr>
-              <a:t> sàng</a:t>
-            </a:r>
-            <a:r>
-              <a:rPr lang="en-US" sz="2850" dirty="0" spc="1" kern="0">
+              <a:t> thêm tài</a:t>
+            </a:r>
+            <a:r>
+              <a:rPr lang="en-US" sz="2850" dirty="0" spc="-15" kern="0">
                 <a:solidFill>
                   <a:srgbClr val="14161C"/>
                 </a:solidFill>
@@ -9780,10 +9769,10 @@
                 <a:ea typeface="Be Vietnam Pro SemiBold" pitchFamily="34" charset="-122"/>
                 <a:cs typeface="Be Vietnam Pro SemiBold" pitchFamily="34" charset="-120"/>
               </a:rPr>
-              <a:t> cần</a:t>
-            </a:r>
-            <a:r>
-              <a:rPr lang="en-US" sz="2850" dirty="0" spc="-3" kern="0">
+              <a:t> nguyên,</a:t>
+            </a:r>
+            <a:r>
+              <a:rPr lang="en-US" sz="2850" dirty="0" spc="-7" kern="0">
                 <a:solidFill>
                   <a:srgbClr val="14161C"/>
                 </a:solidFill>
@@ -9791,51 +9780,7 @@
                 <a:ea typeface="Be Vietnam Pro SemiBold" pitchFamily="34" charset="-122"/>
                 <a:cs typeface="Be Vietnam Pro SemiBold" pitchFamily="34" charset="-120"/>
               </a:rPr>
-              <a:t> thêm</a:t>
-            </a:r>
-            <a:r>
-              <a:rPr lang="en-US" sz="2850" dirty="0" spc="-5" kern="0">
-                <a:solidFill>
-                  <a:srgbClr val="14161C"/>
-                </a:solidFill>
-                <a:latin typeface="Be Vietnam Pro SemiBold" pitchFamily="34" charset="0"/>
-                <a:ea typeface="Be Vietnam Pro SemiBold" pitchFamily="34" charset="-122"/>
-                <a:cs typeface="Be Vietnam Pro SemiBold" pitchFamily="34" charset="-120"/>
-              </a:rPr>
-              <a:t> tài</a:t>
-            </a:r>
-            <a:r>
-              <a:rPr lang="en-US" sz="2850" dirty="0" spc="-16" kern="0">
-                <a:solidFill>
-                  <a:srgbClr val="14161C"/>
-                </a:solidFill>
-                <a:latin typeface="Be Vietnam Pro SemiBold" pitchFamily="34" charset="0"/>
-                <a:ea typeface="Be Vietnam Pro SemiBold" pitchFamily="34" charset="-122"/>
-                <a:cs typeface="Be Vietnam Pro SemiBold" pitchFamily="34" charset="-120"/>
-              </a:rPr>
-              <a:t> nguyên</a:t>
-            </a:r>
-            <a:r>
-              <a:rPr lang="en-US" sz="2850" dirty="0" spc="-2" kern="0">
-                <a:solidFill>
-                  <a:srgbClr val="14161C"/>
-                </a:solidFill>
-                <a:latin typeface="Be Vietnam Pro SemiBold" pitchFamily="34" charset="0"/>
-                <a:ea typeface="Be Vietnam Pro SemiBold" pitchFamily="34" charset="-122"/>
-                <a:cs typeface="Be Vietnam Pro SemiBold" pitchFamily="34" charset="-120"/>
-              </a:rPr>
-              <a:t> hoặc</a:t>
-            </a:r>
-            <a:r>
-              <a:rPr lang="en-US" sz="2850" dirty="0" spc="-7" kern="0">
-                <a:solidFill>
-                  <a:srgbClr val="14161C"/>
-                </a:solidFill>
-                <a:latin typeface="Be Vietnam Pro SemiBold" pitchFamily="34" charset="0"/>
-                <a:ea typeface="Be Vietnam Pro SemiBold" pitchFamily="34" charset="-122"/>
-                <a:cs typeface="Be Vietnam Pro SemiBold" pitchFamily="34" charset="-120"/>
-              </a:rPr>
-              <a:t> công dọn</a:t>
+              <a:t> dọn</a:t>
             </a:r>
             <a:r>
               <a:rPr lang="en-US" sz="2850" dirty="0" spc="-4" kern="0">
@@ -9921,7 +9866,7 @@
               <a:t> bước</a:t>
             </a:r>
             <a:r>
-              <a:rPr lang="en-US" sz="2850" dirty="0" spc="-31" kern="0">
+              <a:rPr lang="en-US" sz="2850" dirty="0" spc="1" kern="0">
                 <a:solidFill>
                   <a:srgbClr val="14161C"/>
                 </a:solidFill>
@@ -9929,10 +9874,10 @@
                 <a:ea typeface="Be Vietnam Pro SemiBold" pitchFamily="34" charset="-122"/>
                 <a:cs typeface="Be Vietnam Pro SemiBold" pitchFamily="34" charset="-120"/>
               </a:rPr>
-              <a:t> kéo</a:t>
-            </a:r>
-            <a:r>
-              <a:rPr lang="en-US" sz="2850" dirty="0" spc="1" kern="0">
+              <a:t> thì</a:t>
+            </a:r>
+            <a:r>
+              <a:rPr lang="en-US" sz="2850" dirty="0" spc="5" kern="0">
                 <a:solidFill>
                   <a:srgbClr val="14161C"/>
                 </a:solidFill>
@@ -9940,10 +9885,10 @@
                 <a:ea typeface="Be Vietnam Pro SemiBold" pitchFamily="34" charset="-122"/>
                 <a:cs typeface="Be Vietnam Pro SemiBold" pitchFamily="34" charset="-120"/>
               </a:rPr>
-              <a:t> dài</a:t>
-            </a:r>
-            <a:r>
-              <a:rPr lang="en-US" sz="2850" dirty="0" spc="0" kern="0">
+              <a:t> lâu</a:t>
+            </a:r>
+            <a:r>
+              <a:rPr lang="en-US" sz="2850" dirty="0" spc="-5" kern="0">
                 <a:solidFill>
                   <a:srgbClr val="14161C"/>
                 </a:solidFill>
@@ -9951,10 +9896,10 @@
                 <a:ea typeface="Be Vietnam Pro SemiBold" pitchFamily="34" charset="-122"/>
                 <a:cs typeface="Be Vietnam Pro SemiBold" pitchFamily="34" charset="-120"/>
               </a:rPr>
-              <a:t> thời</a:t>
-            </a:r>
-            <a:r>
-              <a:rPr lang="en-US" sz="2850" dirty="0" spc="1" kern="0">
+              <a:t> hoàn</a:t>
+            </a:r>
+            <a:r>
+              <a:rPr lang="en-US" sz="2850" dirty="0" spc="-14" kern="0">
                 <a:solidFill>
                   <a:srgbClr val="14161C"/>
                 </a:solidFill>
@@ -9962,10 +9907,10 @@
                 <a:ea typeface="Be Vietnam Pro SemiBold" pitchFamily="34" charset="-122"/>
                 <a:cs typeface="Be Vietnam Pro SemiBold" pitchFamily="34" charset="-120"/>
               </a:rPr>
-              <a:t> gian</a:t>
-            </a:r>
-            <a:r>
-              <a:rPr lang="en-US" sz="2850" dirty="0" spc="-4" kern="0">
+              <a:t> tất</a:t>
+            </a:r>
+            <a:r>
+              <a:rPr lang="en-US" sz="2850" dirty="0" spc="-2" kern="0">
                 <a:solidFill>
                   <a:srgbClr val="14161C"/>
                 </a:solidFill>
@@ -9973,18 +9918,7 @@
                 <a:ea typeface="Be Vietnam Pro SemiBold" pitchFamily="34" charset="-122"/>
                 <a:cs typeface="Be Vietnam Pro SemiBold" pitchFamily="34" charset="-120"/>
               </a:rPr>
-              <a:t> hoàn</a:t>
-            </a:r>
-            <a:r>
-              <a:rPr lang="en-US" sz="2850" dirty="0" spc="-13" kern="0">
-                <a:solidFill>
-                  <a:srgbClr val="14161C"/>
-                </a:solidFill>
-                <a:latin typeface="Be Vietnam Pro SemiBold" pitchFamily="34" charset="0"/>
-                <a:ea typeface="Be Vietnam Pro SemiBold" pitchFamily="34" charset="-122"/>
-                <a:cs typeface="Be Vietnam Pro SemiBold" pitchFamily="34" charset="-120"/>
-              </a:rPr>
-              <a:t> tất.</a:t>
+              <a:t> hơn.</a:t>
             </a:r>
             <a:endParaRPr lang="en-US" sz="2850" dirty="0"/>
           </a:p>

--- a/system-design-101/vi/lessons/sd-13-020/slides/sd-13-020.pptx
+++ b/system-design-101/vi/lessons/sd-13-020/slides/sd-13-020.pptx
@@ -4512,17 +4512,6 @@
               <a:t> rồi</a:t>
             </a:r>
             <a:r>
-              <a:rPr lang="en-US" sz="7800" dirty="0" spc="-39" kern="0">
-                <a:solidFill>
-                  <a:srgbClr val="14161C"/>
-                </a:solidFill>
-                <a:latin typeface="Bricolage Grotesque ExtraBold" pitchFamily="34" charset="0"/>
-                <a:ea typeface="Bricolage Grotesque ExtraBold" pitchFamily="34" charset="-122"/>
-                <a:cs typeface="Bricolage Grotesque ExtraBold" pitchFamily="34" charset="-120"/>
-              </a:rPr>
-              <a:t> mới</a:t>
-            </a:r>
-            <a:r>
               <a:rPr lang="en-US" sz="7800" dirty="0" spc="-2" kern="0">
                 <a:solidFill>
                   <a:srgbClr val="14161C"/>
@@ -13104,26 +13093,15 @@
               <a:t> nhân; DORA</a:t>
             </a:r>
             <a:r>
-              <a:rPr lang="en-US" sz="2400" dirty="0" spc="-1" kern="0">
-                <a:solidFill>
-                  <a:srgbClr val="14161C"/>
-                </a:solidFill>
-                <a:latin typeface="Be Vietnam Pro" pitchFamily="34" charset="0"/>
-                <a:ea typeface="Be Vietnam Pro" pitchFamily="34" charset="-122"/>
-                <a:cs typeface="Be Vietnam Pro" pitchFamily="34" charset="-120"/>
-              </a:rPr>
-              <a:t> liên</a:t>
-            </a:r>
-            <a:r>
-              <a:rPr lang="en-US" sz="2400" dirty="0" spc="0" kern="0">
-                <a:solidFill>
-                  <a:srgbClr val="14161C"/>
-                </a:solidFill>
-                <a:latin typeface="Be Vietnam Pro" pitchFamily="34" charset="0"/>
-                <a:ea typeface="Be Vietnam Pro" pitchFamily="34" charset="-122"/>
-                <a:cs typeface="Be Vietnam Pro" pitchFamily="34" charset="-120"/>
-              </a:rPr>
-              <a:t> hệ</a:t>
+              <a:rPr lang="en-US" sz="2400" dirty="0" spc="-9" kern="0">
+                <a:solidFill>
+                  <a:srgbClr val="14161C"/>
+                </a:solidFill>
+                <a:latin typeface="Be Vietnam Pro" pitchFamily="34" charset="0"/>
+                <a:ea typeface="Be Vietnam Pro" pitchFamily="34" charset="-122"/>
+                <a:cs typeface="Be Vietnam Pro" pitchFamily="34" charset="-120"/>
+              </a:rPr>
+              <a:t> gắn</a:t>
             </a:r>
             <a:r>
               <a:rPr lang="en-US" sz="2400" dirty="0" spc="-13" kern="0">
@@ -13137,7 +13115,7 @@
               <a:t> với</a:t>
             </a:r>
             <a:r>
-              <a:rPr lang="en-US" sz="2400" dirty="0" spc="-1" kern="0">
+              <a:rPr lang="en-US" sz="2400" dirty="0" spc="-2" kern="0">
                 <a:solidFill>
                   <a:srgbClr val="14161C"/>
                 </a:solidFill>
@@ -13148,7 +13126,7 @@
               <a:t> hiệu</a:t>
             </a:r>
             <a:r>
-              <a:rPr lang="en-US" sz="2400" dirty="0" spc="1" kern="0">
+              <a:rPr lang="en-US" sz="2400" dirty="0" spc="2" kern="0">
                 <a:solidFill>
                   <a:srgbClr val="14161C"/>
                 </a:solidFill>
@@ -13159,26 +13137,15 @@
               <a:t> quả</a:t>
             </a:r>
             <a:r>
-              <a:rPr lang="en-US" sz="2400" dirty="0" spc="-16" kern="0">
-                <a:solidFill>
-                  <a:srgbClr val="14161C"/>
-                </a:solidFill>
-                <a:latin typeface="Be Vietnam Pro" pitchFamily="34" charset="0"/>
-                <a:ea typeface="Be Vietnam Pro" pitchFamily="34" charset="-122"/>
-                <a:cs typeface="Be Vietnam Pro" pitchFamily="34" charset="-120"/>
-              </a:rPr>
-              <a:t> tốt</a:t>
-            </a:r>
-            <a:r>
-              <a:rPr lang="en-US" sz="2400" dirty="0" spc="1" kern="0">
-                <a:solidFill>
-                  <a:srgbClr val="14161C"/>
-                </a:solidFill>
-                <a:latin typeface="Be Vietnam Pro" pitchFamily="34" charset="0"/>
-                <a:ea typeface="Be Vietnam Pro" pitchFamily="34" charset="-122"/>
-                <a:cs typeface="Be Vietnam Pro" pitchFamily="34" charset="-120"/>
-              </a:rPr>
-              <a:t> hơn.</a:t>
+              <a:rPr lang="en-US" sz="2400" dirty="0" spc="-13" kern="0">
+                <a:solidFill>
+                  <a:srgbClr val="14161C"/>
+                </a:solidFill>
+                <a:latin typeface="Be Vietnam Pro" pitchFamily="34" charset="0"/>
+                <a:ea typeface="Be Vietnam Pro" pitchFamily="34" charset="-122"/>
+                <a:cs typeface="Be Vietnam Pro" pitchFamily="34" charset="-120"/>
+              </a:rPr>
+              <a:t> tốt.</a:t>
             </a:r>
             <a:endParaRPr lang="en-US" sz="2400" dirty="0"/>
           </a:p>

--- a/system-design-101/vi/lessons/sd-13-020/slides/sd-13-020.pptx
+++ b/system-design-101/vi/lessons/sd-13-020/slides/sd-13-020.pptx
@@ -10322,6 +10322,83 @@
               <a:buNone/>
             </a:pPr>
             <a:r>
+              <a:rPr lang="en-US" sz="1950" b="1" spc="304" kern="0" dirty="0">
+                <a:solidFill>
+                  <a:srgbClr val="7C93FF"/>
+                </a:solidFill>
+                <a:latin typeface="Be Vietnam Pro" pitchFamily="34" charset="0"/>
+                <a:ea typeface="Be Vietnam Pro" pitchFamily="34" charset="-122"/>
+                <a:cs typeface="Be Vietnam Pro" pitchFamily="34" charset="-120"/>
+              </a:rPr>
+              <a:t>VÍ</a:t>
+            </a:r>
+            <a:r>
+              <a:rPr lang="en-US" sz="1950" b="1" spc="302" kern="0" dirty="0">
+                <a:solidFill>
+                  <a:srgbClr val="7C93FF"/>
+                </a:solidFill>
+                <a:latin typeface="Be Vietnam Pro" pitchFamily="34" charset="0"/>
+                <a:ea typeface="Be Vietnam Pro" pitchFamily="34" charset="-122"/>
+                <a:cs typeface="Be Vietnam Pro" pitchFamily="34" charset="-120"/>
+              </a:rPr>
+              <a:t> DỤ</a:t>
+            </a:r>
+            <a:r>
+              <a:rPr lang="en-US" sz="1950" b="1" spc="290" kern="0" dirty="0">
+                <a:solidFill>
+                  <a:srgbClr val="7C93FF"/>
+                </a:solidFill>
+                <a:latin typeface="Be Vietnam Pro" pitchFamily="34" charset="0"/>
+                <a:ea typeface="Be Vietnam Pro" pitchFamily="34" charset="-122"/>
+                <a:cs typeface="Be Vietnam Pro" pitchFamily="34" charset="-120"/>
+              </a:rPr>
+              <a:t> POSTGRESQL</a:t>
+            </a:r>
+            <a:r>
+              <a:rPr lang="en-US" sz="1950" b="1" spc="298" kern="0" dirty="0">
+                <a:solidFill>
+                  <a:srgbClr val="7C93FF"/>
+                </a:solidFill>
+                <a:latin typeface="Be Vietnam Pro" pitchFamily="34" charset="0"/>
+                <a:ea typeface="Be Vietnam Pro" pitchFamily="34" charset="-122"/>
+                <a:cs typeface="Be Vietnam Pro" pitchFamily="34" charset="-120"/>
+              </a:rPr>
+              <a:t> ·</a:t>
+            </a:r>
+            <a:r>
+              <a:rPr lang="en-US" sz="1950" b="1" spc="299" kern="0" dirty="0">
+                <a:solidFill>
+                  <a:srgbClr val="7C93FF"/>
+                </a:solidFill>
+                <a:latin typeface="Be Vietnam Pro" pitchFamily="34" charset="0"/>
+                <a:ea typeface="Be Vietnam Pro" pitchFamily="34" charset="-122"/>
+                <a:cs typeface="Be Vietnam Pro" pitchFamily="34" charset="-120"/>
+              </a:rPr>
+              <a:t> CƠ</a:t>
+            </a:r>
+            <a:r>
+              <a:rPr lang="en-US" sz="1950" b="1" spc="307" kern="0" dirty="0">
+                <a:solidFill>
+                  <a:srgbClr val="7C93FF"/>
+                </a:solidFill>
+                <a:latin typeface="Be Vietnam Pro" pitchFamily="34" charset="0"/>
+                <a:ea typeface="Be Vietnam Pro" pitchFamily="34" charset="-122"/>
+                <a:cs typeface="Be Vietnam Pro" pitchFamily="34" charset="-120"/>
+              </a:rPr>
+              <a:t> SỞ</a:t>
+            </a:r>
+            <a:r>
+              <a:rPr lang="en-US" sz="1950" b="1" spc="302" kern="0" dirty="0">
+                <a:solidFill>
+                  <a:srgbClr val="7C93FF"/>
+                </a:solidFill>
+                <a:latin typeface="Be Vietnam Pro" pitchFamily="34" charset="0"/>
+                <a:ea typeface="Be Vietnam Pro" pitchFamily="34" charset="-122"/>
+                <a:cs typeface="Be Vietnam Pro" pitchFamily="34" charset="-120"/>
+              </a:rPr>
+              <a:t> DỮ</a:t>
+            </a:r>
+            <a:r>
               <a:rPr lang="en-US" sz="1950" b="1" spc="301" kern="0" dirty="0">
                 <a:solidFill>
                   <a:srgbClr val="7C93FF"/>
@@ -10330,10 +10407,10 @@
                 <a:ea typeface="Be Vietnam Pro" pitchFamily="34" charset="-122"/>
                 <a:cs typeface="Be Vietnam Pro" pitchFamily="34" charset="-120"/>
               </a:rPr>
-              <a:t>NHÌN</a:t>
-            </a:r>
-            <a:r>
-              <a:rPr lang="en-US" sz="1950" b="1" spc="302" kern="0" dirty="0">
+              <a:t> LIỆU</a:t>
+            </a:r>
+            <a:r>
+              <a:rPr lang="en-US" sz="1950" b="1" spc="285" kern="0" dirty="0">
                 <a:solidFill>
                   <a:srgbClr val="7C93FF"/>
                 </a:solidFill>
@@ -10341,10 +10418,10 @@
                 <a:ea typeface="Be Vietnam Pro" pitchFamily="34" charset="-122"/>
                 <a:cs typeface="Be Vietnam Pro" pitchFamily="34" charset="-120"/>
               </a:rPr>
-              <a:t> HÌNH</a:t>
-            </a:r>
-            <a:r>
-              <a:rPr lang="en-US" sz="1950" b="1" spc="301" kern="0" dirty="0">
+              <a:t> KHÁC</a:t>
+            </a:r>
+            <a:r>
+              <a:rPr lang="en-US" sz="1950" b="1" spc="299" kern="0" dirty="0">
                 <a:solidFill>
                   <a:srgbClr val="7C93FF"/>
                 </a:solidFill>
@@ -10352,7 +10429,7 @@
                 <a:ea typeface="Be Vietnam Pro" pitchFamily="34" charset="-122"/>
                 <a:cs typeface="Be Vietnam Pro" pitchFamily="34" charset="-120"/>
               </a:rPr>
-              <a:t> THỬ</a:t>
+              <a:t> CÓ</a:t>
             </a:r>
             <a:r>
               <a:rPr lang="en-US" sz="1950" b="1" spc="300" kern="0" dirty="0">
@@ -10363,10 +10440,10 @@
                 <a:ea typeface="Be Vietnam Pro" pitchFamily="34" charset="-122"/>
                 <a:cs typeface="Be Vietnam Pro" pitchFamily="34" charset="-120"/>
               </a:rPr>
-              <a:t> TRẢ</a:t>
-            </a:r>
-            <a:r>
-              <a:rPr lang="en-US" sz="1950" b="1" spc="279" kern="0" dirty="0">
+              <a:t> THỂ</a:t>
+            </a:r>
+            <a:r>
+              <a:rPr lang="en-US" sz="1950" b="1" spc="285" kern="0" dirty="0">
                 <a:solidFill>
                   <a:srgbClr val="7C93FF"/>
                 </a:solidFill>
@@ -10374,7 +10451,7 @@
                 <a:ea typeface="Be Vietnam Pro" pitchFamily="34" charset="-122"/>
                 <a:cs typeface="Be Vietnam Pro" pitchFamily="34" charset="-120"/>
               </a:rPr>
-              <a:t> LỜI</a:t>
+              <a:t> KHÁC</a:t>
             </a:r>
             <a:endParaRPr lang="en-US" sz="1950" dirty="0"/>
           </a:p>
